--- a/Day5/5-paev-andmetarkus-esitlus.pptx
+++ b/Day5/5-paev-andmetarkus-esitlus.pptx
@@ -5,10 +5,10 @@
     <p:sldMasterId id="2147483648" r:id="rId4"/>
   </p:sldMasterIdLst>
   <p:notesMasterIdLst>
-    <p:notesMasterId r:id="rId23"/>
+    <p:notesMasterId r:id="rId22"/>
   </p:notesMasterIdLst>
   <p:handoutMasterIdLst>
-    <p:handoutMasterId r:id="rId24"/>
+    <p:handoutMasterId r:id="rId23"/>
   </p:handoutMasterIdLst>
   <p:sldIdLst>
     <p:sldId id="417" r:id="rId5"/>
@@ -17,35 +17,34 @@
     <p:sldId id="465" r:id="rId8"/>
     <p:sldId id="466" r:id="rId9"/>
     <p:sldId id="468" r:id="rId10"/>
-    <p:sldId id="488" r:id="rId11"/>
-    <p:sldId id="545" r:id="rId12"/>
-    <p:sldId id="547" r:id="rId13"/>
-    <p:sldId id="548" r:id="rId14"/>
-    <p:sldId id="546" r:id="rId15"/>
-    <p:sldId id="550" r:id="rId16"/>
-    <p:sldId id="549" r:id="rId17"/>
-    <p:sldId id="551" r:id="rId18"/>
-    <p:sldId id="464" r:id="rId19"/>
-    <p:sldId id="553" r:id="rId20"/>
-    <p:sldId id="552" r:id="rId21"/>
-    <p:sldId id="469" r:id="rId22"/>
+    <p:sldId id="469" r:id="rId11"/>
+    <p:sldId id="488" r:id="rId12"/>
+    <p:sldId id="545" r:id="rId13"/>
+    <p:sldId id="547" r:id="rId14"/>
+    <p:sldId id="548" r:id="rId15"/>
+    <p:sldId id="546" r:id="rId16"/>
+    <p:sldId id="550" r:id="rId17"/>
+    <p:sldId id="549" r:id="rId18"/>
+    <p:sldId id="551" r:id="rId19"/>
+    <p:sldId id="464" r:id="rId20"/>
+    <p:sldId id="553" r:id="rId21"/>
   </p:sldIdLst>
   <p:sldSz cx="12192000" cy="6858000"/>
   <p:notesSz cx="6858000" cy="9144000"/>
   <p:embeddedFontLst>
     <p:embeddedFont>
       <p:font typeface="Inter" panose="020B0604020202020204" charset="0"/>
-      <p:regular r:id="rId25"/>
+      <p:regular r:id="rId24"/>
+      <p:bold r:id="rId25"/>
+    </p:embeddedFont>
+    <p:embeddedFont>
+      <p:font typeface="Inter Bold" panose="020B0604020202020204" charset="0"/>
       <p:bold r:id="rId26"/>
     </p:embeddedFont>
     <p:embeddedFont>
-      <p:font typeface="Inter Bold" panose="020B0604020202020204" charset="0"/>
+      <p:font typeface="Poppins SemiBold" panose="00000700000000000000" pitchFamily="2" charset="0"/>
       <p:bold r:id="rId27"/>
-    </p:embeddedFont>
-    <p:embeddedFont>
-      <p:font typeface="Poppins SemiBold" panose="00000700000000000000" pitchFamily="2" charset="0"/>
-      <p:bold r:id="rId28"/>
-      <p:boldItalic r:id="rId29"/>
+      <p:boldItalic r:id="rId28"/>
     </p:embeddedFont>
   </p:embeddedFontLst>
   <p:defaultTextStyle>
@@ -154,15 +153,30 @@
 </p:presentation>
 </file>
 
+<file path=ppt/revisionInfo.xml><?xml version="1.0" encoding="utf-8"?>
+<p1510:revInfo xmlns:a="http://schemas.openxmlformats.org/drawingml/2006/main" xmlns:r="http://schemas.openxmlformats.org/officeDocument/2006/relationships" xmlns:p1510="http://schemas.microsoft.com/office/powerpoint/2015/10/main">
+  <p1510:revLst>
+    <p1510:client id="{C887EDB0-064C-4E05-9D72-910205DF4E4E}" v="1" dt="2026-04-05T16:54:01.727"/>
+  </p1510:revLst>
+</p1510:revInfo>
+</file>
+
 <file path=ppt/changesInfos/changesInfo1.xml><?xml version="1.0" encoding="utf-8"?>
 <pc:chgInfo xmlns:a="http://schemas.openxmlformats.org/drawingml/2006/main" xmlns:r="http://schemas.openxmlformats.org/officeDocument/2006/relationships" xmlns:ac="http://schemas.microsoft.com/office/drawing/2013/main/command" xmlns:pc="http://schemas.microsoft.com/office/powerpoint/2013/main/command">
   <pc:docChgLst>
     <pc:chgData name="Virve Räni" userId="161a7437-7ef4-49ec-91bf-54882f313dfe" providerId="ADAL" clId="{6D754EED-65AA-4A21-B175-6769012CF487}"/>
-    <pc:docChg chg="modSld">
-      <pc:chgData name="Virve Räni" userId="161a7437-7ef4-49ec-91bf-54882f313dfe" providerId="ADAL" clId="{6D754EED-65AA-4A21-B175-6769012CF487}" dt="2026-03-16T10:55:17.210" v="4" actId="20577"/>
+    <pc:docChg chg="delSld modSld sldOrd">
+      <pc:chgData name="Virve Räni" userId="161a7437-7ef4-49ec-91bf-54882f313dfe" providerId="ADAL" clId="{6D754EED-65AA-4A21-B175-6769012CF487}" dt="2026-04-05T16:54:55.393" v="180" actId="47"/>
       <pc:docMkLst>
         <pc:docMk/>
       </pc:docMkLst>
+      <pc:sldChg chg="ord">
+        <pc:chgData name="Virve Räni" userId="161a7437-7ef4-49ec-91bf-54882f313dfe" providerId="ADAL" clId="{6D754EED-65AA-4A21-B175-6769012CF487}" dt="2026-04-05T16:34:53.944" v="6"/>
+        <pc:sldMkLst>
+          <pc:docMk/>
+          <pc:sldMk cId="3665876313" sldId="469"/>
+        </pc:sldMkLst>
+      </pc:sldChg>
       <pc:sldChg chg="modSp mod">
         <pc:chgData name="Virve Räni" userId="161a7437-7ef4-49ec-91bf-54882f313dfe" providerId="ADAL" clId="{6D754EED-65AA-4A21-B175-6769012CF487}" dt="2026-03-16T10:28:56.070" v="0" actId="20577"/>
         <pc:sldMkLst>
@@ -179,17 +193,69 @@
         </pc:spChg>
       </pc:sldChg>
       <pc:sldChg chg="modSp mod">
-        <pc:chgData name="Virve Räni" userId="161a7437-7ef4-49ec-91bf-54882f313dfe" providerId="ADAL" clId="{6D754EED-65AA-4A21-B175-6769012CF487}" dt="2026-03-16T10:55:17.210" v="4" actId="20577"/>
+        <pc:chgData name="Virve Räni" userId="161a7437-7ef4-49ec-91bf-54882f313dfe" providerId="ADAL" clId="{6D754EED-65AA-4A21-B175-6769012CF487}" dt="2026-04-05T16:38:45.328" v="61" actId="20577"/>
         <pc:sldMkLst>
           <pc:docMk/>
           <pc:sldMk cId="1818633253" sldId="488"/>
         </pc:sldMkLst>
         <pc:spChg chg="mod">
-          <ac:chgData name="Virve Räni" userId="161a7437-7ef4-49ec-91bf-54882f313dfe" providerId="ADAL" clId="{6D754EED-65AA-4A21-B175-6769012CF487}" dt="2026-03-16T10:55:17.210" v="4" actId="20577"/>
+          <ac:chgData name="Virve Räni" userId="161a7437-7ef4-49ec-91bf-54882f313dfe" providerId="ADAL" clId="{6D754EED-65AA-4A21-B175-6769012CF487}" dt="2026-04-05T16:38:45.328" v="61" actId="20577"/>
           <ac:spMkLst>
             <pc:docMk/>
             <pc:sldMk cId="1818633253" sldId="488"/>
             <ac:spMk id="6" creationId="{EFAB63D7-8625-0273-BB8D-70F4FFAE506E}"/>
+          </ac:spMkLst>
+        </pc:spChg>
+      </pc:sldChg>
+      <pc:sldChg chg="modSp mod">
+        <pc:chgData name="Virve Räni" userId="161a7437-7ef4-49ec-91bf-54882f313dfe" providerId="ADAL" clId="{6D754EED-65AA-4A21-B175-6769012CF487}" dt="2026-04-05T16:52:57.741" v="140" actId="20577"/>
+        <pc:sldMkLst>
+          <pc:docMk/>
+          <pc:sldMk cId="1929900480" sldId="547"/>
+        </pc:sldMkLst>
+        <pc:spChg chg="mod">
+          <ac:chgData name="Virve Räni" userId="161a7437-7ef4-49ec-91bf-54882f313dfe" providerId="ADAL" clId="{6D754EED-65AA-4A21-B175-6769012CF487}" dt="2026-04-05T16:52:57.741" v="140" actId="20577"/>
+          <ac:spMkLst>
+            <pc:docMk/>
+            <pc:sldMk cId="1929900480" sldId="547"/>
+            <ac:spMk id="6" creationId="{881D8A84-5C3E-D3EC-7BBA-46AD750AB1C1}"/>
+          </ac:spMkLst>
+        </pc:spChg>
+      </pc:sldChg>
+      <pc:sldChg chg="modSp mod">
+        <pc:chgData name="Virve Räni" userId="161a7437-7ef4-49ec-91bf-54882f313dfe" providerId="ADAL" clId="{6D754EED-65AA-4A21-B175-6769012CF487}" dt="2026-04-05T16:54:06.117" v="169" actId="20577"/>
+        <pc:sldMkLst>
+          <pc:docMk/>
+          <pc:sldMk cId="2288183761" sldId="550"/>
+        </pc:sldMkLst>
+        <pc:spChg chg="mod">
+          <ac:chgData name="Virve Räni" userId="161a7437-7ef4-49ec-91bf-54882f313dfe" providerId="ADAL" clId="{6D754EED-65AA-4A21-B175-6769012CF487}" dt="2026-04-05T16:54:06.117" v="169" actId="20577"/>
+          <ac:spMkLst>
+            <pc:docMk/>
+            <pc:sldMk cId="2288183761" sldId="550"/>
+            <ac:spMk id="6" creationId="{5622CFD7-E0AE-CAFB-FD62-2D9E32335DFA}"/>
+          </ac:spMkLst>
+        </pc:spChg>
+      </pc:sldChg>
+      <pc:sldChg chg="del">
+        <pc:chgData name="Virve Räni" userId="161a7437-7ef4-49ec-91bf-54882f313dfe" providerId="ADAL" clId="{6D754EED-65AA-4A21-B175-6769012CF487}" dt="2026-04-05T16:54:55.393" v="180" actId="47"/>
+        <pc:sldMkLst>
+          <pc:docMk/>
+          <pc:sldMk cId="897385100" sldId="552"/>
+        </pc:sldMkLst>
+      </pc:sldChg>
+      <pc:sldChg chg="modSp mod">
+        <pc:chgData name="Virve Räni" userId="161a7437-7ef4-49ec-91bf-54882f313dfe" providerId="ADAL" clId="{6D754EED-65AA-4A21-B175-6769012CF487}" dt="2026-04-05T16:54:51.398" v="179" actId="20577"/>
+        <pc:sldMkLst>
+          <pc:docMk/>
+          <pc:sldMk cId="3628489419" sldId="553"/>
+        </pc:sldMkLst>
+        <pc:spChg chg="mod">
+          <ac:chgData name="Virve Räni" userId="161a7437-7ef4-49ec-91bf-54882f313dfe" providerId="ADAL" clId="{6D754EED-65AA-4A21-B175-6769012CF487}" dt="2026-04-05T16:54:51.398" v="179" actId="20577"/>
+          <ac:spMkLst>
+            <pc:docMk/>
+            <pc:sldMk cId="3628489419" sldId="553"/>
+            <ac:spMk id="6" creationId="{1E0C0BAC-6C7D-82E8-4B1F-5672297476A1}"/>
           </ac:spMkLst>
         </pc:spChg>
       </pc:sldChg>
@@ -292,7 +358,7 @@
           <a:p>
             <a:fld id="{F9D2AD6E-DEDD-49A0-A4BE-7A081A9112DA}" type="datetimeFigureOut">
               <a:rPr lang="en-US" smtClean="0"/>
-              <a:t>3/16/2026</a:t>
+              <a:t>4/5/2026</a:t>
             </a:fld>
             <a:endParaRPr lang="en-US"/>
           </a:p>
@@ -468,7 +534,7 @@
           </a:lstStyle>
           <a:p>
             <a:fld id="{2AF9C1A6-4321-41FA-B001-4140F0E2457F}" type="datetimeFigureOut">
-              <a:t>16.03.2026</a:t>
+              <a:t>05.04.2026</a:t>
             </a:fld>
             <a:endParaRPr lang="en-US"/>
           </a:p>
@@ -978,10 +1044,10 @@
           <p:nvPr userDrawn="1"/>
         </p:nvPicPr>
         <p:blipFill>
-          <a:blip r:embed="rId2">
+          <a:blip>
             <a:extLst>
               <a:ext uri="{96DAC541-7B7A-43D3-8B79-37D633B846F1}">
-                <asvg:svgBlip xmlns:asvg="http://schemas.microsoft.com/office/drawing/2016/SVG/main" r:embed="rId3"/>
+                <asvg:svgBlip xmlns:asvg="http://schemas.microsoft.com/office/drawing/2016/SVG/main" r:embed="rId2"/>
               </a:ext>
             </a:extLst>
           </a:blip>
@@ -10539,10 +10605,10 @@
             <a:ext cx="810000" cy="320400"/>
           </a:xfrm>
           <a:blipFill>
-            <a:blip r:embed="rId2">
+            <a:blip>
               <a:extLst>
                 <a:ext uri="{96DAC541-7B7A-43D3-8B79-37D633B846F1}">
-                  <asvg:svgBlip xmlns:asvg="http://schemas.microsoft.com/office/drawing/2016/SVG/main" r:embed="rId3"/>
+                  <asvg:svgBlip xmlns:asvg="http://schemas.microsoft.com/office/drawing/2016/SVG/main" r:embed="rId2"/>
                 </a:ext>
               </a:extLst>
             </a:blip>
@@ -11821,10 +11887,10 @@
             <a:ext cx="810000" cy="320400"/>
           </a:xfrm>
           <a:blipFill>
-            <a:blip r:embed="rId2">
+            <a:blip>
               <a:extLst>
                 <a:ext uri="{96DAC541-7B7A-43D3-8B79-37D633B846F1}">
-                  <asvg:svgBlip xmlns:asvg="http://schemas.microsoft.com/office/drawing/2016/SVG/main" r:embed="rId3"/>
+                  <asvg:svgBlip xmlns:asvg="http://schemas.microsoft.com/office/drawing/2016/SVG/main" r:embed="rId2"/>
                 </a:ext>
               </a:extLst>
             </a:blip>
@@ -12065,7 +12131,7 @@
           <a:p>
             <a:fld id="{DE840A40-73C8-4048-8140-49F5D65BB431}" type="datetimeFigureOut">
               <a:rPr lang="et-EE" smtClean="0"/>
-              <a:t>16.03.2026</a:t>
+              <a:t>05.04.2026</a:t>
             </a:fld>
             <a:endParaRPr lang="et-EE"/>
           </a:p>
@@ -12178,10 +12244,10 @@
           <p:nvPr userDrawn="1"/>
         </p:nvPicPr>
         <p:blipFill>
-          <a:blip r:embed="rId2">
+          <a:blip>
             <a:extLst>
               <a:ext uri="{96DAC541-7B7A-43D3-8B79-37D633B846F1}">
-                <asvg:svgBlip xmlns:asvg="http://schemas.microsoft.com/office/drawing/2016/SVG/main" r:embed="rId3"/>
+                <asvg:svgBlip xmlns:asvg="http://schemas.microsoft.com/office/drawing/2016/SVG/main" r:embed="rId2"/>
               </a:ext>
             </a:extLst>
           </a:blip>
@@ -19160,10 +19226,10 @@
             <a:ext cx="2302064" cy="927536"/>
           </a:xfrm>
           <a:blipFill>
-            <a:blip r:embed="rId2">
+            <a:blip>
               <a:extLst>
                 <a:ext uri="{96DAC541-7B7A-43D3-8B79-37D633B846F1}">
-                  <asvg:svgBlip xmlns:asvg="http://schemas.microsoft.com/office/drawing/2016/SVG/main" r:embed="rId3"/>
+                  <asvg:svgBlip xmlns:asvg="http://schemas.microsoft.com/office/drawing/2016/SVG/main" r:embed="rId2"/>
                 </a:ext>
               </a:extLst>
             </a:blip>
@@ -19346,10 +19412,10 @@
           <p:nvPr userDrawn="1"/>
         </p:nvPicPr>
         <p:blipFill>
-          <a:blip r:embed="rId2">
+          <a:blip>
             <a:extLst>
               <a:ext uri="{96DAC541-7B7A-43D3-8B79-37D633B846F1}">
-                <asvg:svgBlip xmlns:asvg="http://schemas.microsoft.com/office/drawing/2016/SVG/main" r:embed="rId3"/>
+                <asvg:svgBlip xmlns:asvg="http://schemas.microsoft.com/office/drawing/2016/SVG/main" r:embed="rId2"/>
               </a:ext>
             </a:extLst>
           </a:blip>
@@ -20080,10 +20146,10 @@
           <p:nvPr userDrawn="1"/>
         </p:nvPicPr>
         <p:blipFill>
-          <a:blip r:embed="rId2">
+          <a:blip>
             <a:extLst>
               <a:ext uri="{96DAC541-7B7A-43D3-8B79-37D633B846F1}">
-                <asvg:svgBlip xmlns:asvg="http://schemas.microsoft.com/office/drawing/2016/SVG/main" r:embed="rId3"/>
+                <asvg:svgBlip xmlns:asvg="http://schemas.microsoft.com/office/drawing/2016/SVG/main" r:embed="rId2"/>
               </a:ext>
             </a:extLst>
           </a:blip>
@@ -20869,10 +20935,10 @@
             <a:ext cx="810000" cy="320400"/>
           </a:xfrm>
           <a:blipFill>
-            <a:blip r:embed="rId2">
+            <a:blip>
               <a:extLst>
                 <a:ext uri="{96DAC541-7B7A-43D3-8B79-37D633B846F1}">
-                  <asvg:svgBlip xmlns:asvg="http://schemas.microsoft.com/office/drawing/2016/SVG/main" r:embed="rId3"/>
+                  <asvg:svgBlip xmlns:asvg="http://schemas.microsoft.com/office/drawing/2016/SVG/main" r:embed="rId2"/>
                 </a:ext>
               </a:extLst>
             </a:blip>
@@ -24180,6 +24246,324 @@
         <p:cNvPr id="1" name="">
           <a:extLst>
             <a:ext uri="{FF2B5EF4-FFF2-40B4-BE49-F238E27FC236}">
+              <a16:creationId xmlns:a16="http://schemas.microsoft.com/office/drawing/2014/main" id="{554F17EF-948F-440F-9776-D47D637800CE}"/>
+            </a:ext>
+          </a:extLst>
+        </p:cNvPr>
+        <p:cNvGrpSpPr/>
+        <p:nvPr/>
+      </p:nvGrpSpPr>
+      <p:grpSpPr>
+        <a:xfrm>
+          <a:off x="0" y="0"/>
+          <a:ext cx="0" cy="0"/>
+          <a:chOff x="0" y="0"/>
+          <a:chExt cx="0" cy="0"/>
+        </a:xfrm>
+      </p:grpSpPr>
+      <p:sp>
+        <p:nvSpPr>
+          <p:cNvPr id="2" name="Title 1">
+            <a:extLst>
+              <a:ext uri="{FF2B5EF4-FFF2-40B4-BE49-F238E27FC236}">
+                <a16:creationId xmlns:a16="http://schemas.microsoft.com/office/drawing/2014/main" id="{E0AF7675-D5E2-4284-152D-B43170B2B2B8}"/>
+              </a:ext>
+            </a:extLst>
+          </p:cNvPr>
+          <p:cNvSpPr>
+            <a:spLocks noGrp="1"/>
+          </p:cNvSpPr>
+          <p:nvPr>
+            <p:ph type="ctrTitle"/>
+          </p:nvPr>
+        </p:nvSpPr>
+        <p:spPr/>
+        <p:txBody>
+          <a:bodyPr/>
+          <a:lstStyle/>
+          <a:p>
+            <a:r>
+              <a:rPr lang="en-US"/>
+              <a:t>SQL –  </a:t>
+            </a:r>
+            <a:r>
+              <a:rPr lang="en-US" err="1"/>
+              <a:t>põhikäsud</a:t>
+            </a:r>
+          </a:p>
+        </p:txBody>
+      </p:sp>
+      <p:sp>
+        <p:nvSpPr>
+          <p:cNvPr id="3" name="Content Placeholder 2">
+            <a:extLst>
+              <a:ext uri="{FF2B5EF4-FFF2-40B4-BE49-F238E27FC236}">
+                <a16:creationId xmlns:a16="http://schemas.microsoft.com/office/drawing/2014/main" id="{DD4A3DF0-7EC7-0A70-4125-F5DB0D9859E0}"/>
+              </a:ext>
+            </a:extLst>
+          </p:cNvPr>
+          <p:cNvSpPr>
+            <a:spLocks noGrp="1"/>
+          </p:cNvSpPr>
+          <p:nvPr>
+            <p:ph sz="quarter" idx="10"/>
+          </p:nvPr>
+        </p:nvSpPr>
+        <p:spPr/>
+        <p:txBody>
+          <a:bodyPr/>
+          <a:lstStyle/>
+          <a:p>
+            <a:pPr>
+              <a:lnSpc>
+                <a:spcPct val="150000"/>
+              </a:lnSpc>
+            </a:pPr>
+            <a:endParaRPr lang="en-US" sz="2400" dirty="0"/>
+          </a:p>
+          <a:p>
+            <a:pPr>
+              <a:lnSpc>
+                <a:spcPct val="150000"/>
+              </a:lnSpc>
+            </a:pPr>
+            <a:endParaRPr lang="en-US" sz="2400" dirty="0"/>
+          </a:p>
+        </p:txBody>
+      </p:sp>
+      <p:sp>
+        <p:nvSpPr>
+          <p:cNvPr id="6" name="TextBox 5">
+            <a:extLst>
+              <a:ext uri="{FF2B5EF4-FFF2-40B4-BE49-F238E27FC236}">
+                <a16:creationId xmlns:a16="http://schemas.microsoft.com/office/drawing/2014/main" id="{881D8A84-5C3E-D3EC-7BBA-46AD750AB1C1}"/>
+              </a:ext>
+            </a:extLst>
+          </p:cNvPr>
+          <p:cNvSpPr txBox="1"/>
+          <p:nvPr/>
+        </p:nvSpPr>
+        <p:spPr>
+          <a:xfrm>
+            <a:off x="677170" y="1222424"/>
+            <a:ext cx="10386210" cy="1292662"/>
+          </a:xfrm>
+          <a:prstGeom prst="rect">
+            <a:avLst/>
+          </a:prstGeom>
+          <a:noFill/>
+        </p:spPr>
+        <p:txBody>
+          <a:bodyPr rot="0" spcFirstLastPara="0" vertOverflow="overflow" horzOverflow="overflow" vert="horz" wrap="square" lIns="91440" tIns="45720" rIns="91440" bIns="45720" numCol="1" spcCol="0" rtlCol="0" fromWordArt="0" anchor="t" anchorCtr="0" forceAA="0" compatLnSpc="1">
+            <a:prstTxWarp prst="textNoShape">
+              <a:avLst/>
+            </a:prstTxWarp>
+            <a:spAutoFit/>
+          </a:bodyPr>
+          <a:lstStyle/>
+          <a:p>
+            <a:pPr marL="285750" indent="-285750">
+              <a:lnSpc>
+                <a:spcPct val="150000"/>
+              </a:lnSpc>
+              <a:buFont typeface="Arial"/>
+              <a:buChar char="•"/>
+            </a:pPr>
+            <a:r>
+              <a:rPr lang="en-US" sz="2000" dirty="0" err="1">
+                <a:solidFill>
+                  <a:srgbClr val="121212"/>
+                </a:solidFill>
+                <a:ea typeface="+mn-lt"/>
+                <a:cs typeface="+mn-lt"/>
+              </a:rPr>
+              <a:t>Lahendame</a:t>
+            </a:r>
+            <a:r>
+              <a:rPr lang="en-US" sz="2000" dirty="0">
+                <a:solidFill>
+                  <a:srgbClr val="121212"/>
+                </a:solidFill>
+                <a:ea typeface="+mn-lt"/>
+                <a:cs typeface="+mn-lt"/>
+              </a:rPr>
+              <a:t> </a:t>
+            </a:r>
+            <a:r>
+              <a:rPr lang="en-US" sz="2000" dirty="0" err="1">
+                <a:solidFill>
+                  <a:srgbClr val="121212"/>
+                </a:solidFill>
+                <a:ea typeface="+mn-lt"/>
+                <a:cs typeface="+mn-lt"/>
+              </a:rPr>
+              <a:t>koos</a:t>
+            </a:r>
+            <a:r>
+              <a:rPr lang="en-US" sz="2000" dirty="0">
+                <a:solidFill>
+                  <a:srgbClr val="121212"/>
+                </a:solidFill>
+                <a:ea typeface="+mn-lt"/>
+                <a:cs typeface="+mn-lt"/>
+              </a:rPr>
+              <a:t> </a:t>
+            </a:r>
+            <a:r>
+              <a:rPr lang="en-US" sz="2000" dirty="0" err="1">
+                <a:solidFill>
+                  <a:srgbClr val="121212"/>
+                </a:solidFill>
+                <a:ea typeface="+mn-lt"/>
+                <a:cs typeface="+mn-lt"/>
+              </a:rPr>
+              <a:t>esimesed</a:t>
+            </a:r>
+            <a:r>
+              <a:rPr lang="en-US" sz="2000" dirty="0">
+                <a:solidFill>
+                  <a:srgbClr val="121212"/>
+                </a:solidFill>
+                <a:ea typeface="+mn-lt"/>
+                <a:cs typeface="+mn-lt"/>
+              </a:rPr>
+              <a:t> </a:t>
+            </a:r>
+            <a:r>
+              <a:rPr lang="en-US" sz="2000" dirty="0" err="1">
+                <a:solidFill>
+                  <a:srgbClr val="121212"/>
+                </a:solidFill>
+                <a:ea typeface="+mn-lt"/>
+                <a:cs typeface="+mn-lt"/>
+              </a:rPr>
+              <a:t>neli</a:t>
+            </a:r>
+            <a:r>
+              <a:rPr lang="en-US" sz="2000" dirty="0">
+                <a:solidFill>
+                  <a:srgbClr val="121212"/>
+                </a:solidFill>
+                <a:ea typeface="+mn-lt"/>
+                <a:cs typeface="+mn-lt"/>
+              </a:rPr>
+              <a:t> </a:t>
+            </a:r>
+            <a:r>
+              <a:rPr lang="en-US" sz="2000" dirty="0" err="1">
+                <a:solidFill>
+                  <a:srgbClr val="121212"/>
+                </a:solidFill>
+                <a:ea typeface="+mn-lt"/>
+                <a:cs typeface="+mn-lt"/>
+              </a:rPr>
+              <a:t>ülesannet</a:t>
+            </a:r>
+            <a:r>
+              <a:rPr lang="en-US" sz="2000" dirty="0">
+                <a:solidFill>
+                  <a:srgbClr val="121212"/>
+                </a:solidFill>
+                <a:ea typeface="+mn-lt"/>
+                <a:cs typeface="+mn-lt"/>
+              </a:rPr>
+              <a:t>: sql_ulesanded_2.txt</a:t>
+            </a:r>
+          </a:p>
+          <a:p>
+            <a:pPr marL="285750" indent="-285750">
+              <a:lnSpc>
+                <a:spcPct val="150000"/>
+              </a:lnSpc>
+              <a:buFont typeface="Arial"/>
+              <a:buChar char="•"/>
+            </a:pPr>
+            <a:r>
+              <a:rPr lang="en-US" sz="2000" dirty="0" err="1">
+                <a:solidFill>
+                  <a:srgbClr val="121212"/>
+                </a:solidFill>
+                <a:ea typeface="+mn-lt"/>
+                <a:cs typeface="+mn-lt"/>
+              </a:rPr>
+              <a:t>Edasi</a:t>
+            </a:r>
+            <a:r>
+              <a:rPr lang="en-US" sz="2000" dirty="0">
+                <a:solidFill>
+                  <a:srgbClr val="121212"/>
+                </a:solidFill>
+                <a:ea typeface="+mn-lt"/>
+                <a:cs typeface="+mn-lt"/>
+              </a:rPr>
+              <a:t> </a:t>
+            </a:r>
+            <a:r>
+              <a:rPr lang="en-US" sz="2000" dirty="0" err="1">
+                <a:solidFill>
+                  <a:srgbClr val="121212"/>
+                </a:solidFill>
+                <a:ea typeface="+mn-lt"/>
+                <a:cs typeface="+mn-lt"/>
+              </a:rPr>
+              <a:t>lahendage</a:t>
+            </a:r>
+            <a:r>
+              <a:rPr lang="en-US" sz="2000" dirty="0">
+                <a:solidFill>
+                  <a:srgbClr val="121212"/>
+                </a:solidFill>
+                <a:ea typeface="+mn-lt"/>
+                <a:cs typeface="+mn-lt"/>
+              </a:rPr>
+              <a:t> </a:t>
+            </a:r>
+            <a:r>
+              <a:rPr lang="en-US" sz="2000" dirty="0" err="1">
+                <a:solidFill>
+                  <a:srgbClr val="121212"/>
+                </a:solidFill>
+                <a:ea typeface="+mn-lt"/>
+                <a:cs typeface="+mn-lt"/>
+              </a:rPr>
+              <a:t>iseseisvalt</a:t>
+            </a:r>
+            <a:endParaRPr lang="en-US" sz="2000" dirty="0">
+              <a:solidFill>
+                <a:srgbClr val="121212"/>
+              </a:solidFill>
+              <a:ea typeface="+mn-lt"/>
+              <a:cs typeface="+mn-lt"/>
+            </a:endParaRPr>
+          </a:p>
+          <a:p>
+            <a:endParaRPr lang="en-US" dirty="0">
+              <a:ea typeface="Inter"/>
+            </a:endParaRPr>
+          </a:p>
+        </p:txBody>
+      </p:sp>
+    </p:spTree>
+    <p:extLst>
+      <p:ext uri="{BB962C8B-B14F-4D97-AF65-F5344CB8AC3E}">
+        <p14:creationId xmlns:p14="http://schemas.microsoft.com/office/powerpoint/2010/main" val="1929900480"/>
+      </p:ext>
+    </p:extLst>
+  </p:cSld>
+  <p:clrMapOvr>
+    <a:masterClrMapping/>
+  </p:clrMapOvr>
+</p:sld>
+</file>
+
+<file path=ppt/slides/slide11.xml><?xml version="1.0" encoding="utf-8"?>
+<p:sld xmlns:a="http://schemas.openxmlformats.org/drawingml/2006/main" xmlns:r="http://schemas.openxmlformats.org/officeDocument/2006/relationships" xmlns:p="http://schemas.openxmlformats.org/presentationml/2006/main">
+  <p:cSld>
+    <p:spTree>
+      <p:nvGrpSpPr>
+        <p:cNvPr id="1" name="">
+          <a:extLst>
+            <a:ext uri="{FF2B5EF4-FFF2-40B4-BE49-F238E27FC236}">
               <a16:creationId xmlns:a16="http://schemas.microsoft.com/office/drawing/2014/main" id="{2BE96BEE-9A76-72C4-375A-62C991CD153F}"/>
             </a:ext>
           </a:extLst>
@@ -24310,7 +24694,7 @@
 </p:sld>
 </file>
 
-<file path=ppt/slides/slide11.xml><?xml version="1.0" encoding="utf-8"?>
+<file path=ppt/slides/slide12.xml><?xml version="1.0" encoding="utf-8"?>
 <p:sld xmlns:a="http://schemas.openxmlformats.org/drawingml/2006/main" xmlns:r="http://schemas.openxmlformats.org/officeDocument/2006/relationships" xmlns:p="http://schemas.openxmlformats.org/presentationml/2006/main">
   <p:cSld>
     <p:spTree>
@@ -24427,7 +24811,7 @@
 </p:sld>
 </file>
 
-<file path=ppt/slides/slide12.xml><?xml version="1.0" encoding="utf-8"?>
+<file path=ppt/slides/slide13.xml><?xml version="1.0" encoding="utf-8"?>
 <p:sld xmlns:a="http://schemas.openxmlformats.org/drawingml/2006/main" xmlns:r="http://schemas.openxmlformats.org/officeDocument/2006/relationships" xmlns:p="http://schemas.openxmlformats.org/presentationml/2006/main">
   <p:cSld>
     <p:spTree>
@@ -24543,7 +24927,7 @@
         <p:spPr>
           <a:xfrm>
             <a:off x="677170" y="1222424"/>
-            <a:ext cx="10386210" cy="830997"/>
+            <a:ext cx="10386210" cy="1754326"/>
           </a:xfrm>
           <a:prstGeom prst="rect">
             <a:avLst/>
@@ -24567,28 +24951,63 @@
               <a:buChar char="•"/>
             </a:pPr>
             <a:r>
-              <a:rPr lang="en-US" sz="2000" err="1">
+              <a:rPr lang="en-US" sz="2000" dirty="0">
                 <a:solidFill>
                   <a:srgbClr val="121212"/>
                 </a:solidFill>
                 <a:ea typeface="+mn-lt"/>
                 <a:cs typeface="+mn-lt"/>
               </a:rPr>
-              <a:t>Iseseisvalt</a:t>
-            </a:r>
-            <a:r>
-              <a:rPr lang="en-US" sz="2000">
+              <a:t>Koos: sql_ulesanded_3.txt</a:t>
+            </a:r>
+          </a:p>
+          <a:p>
+            <a:pPr marL="285750" indent="-285750">
+              <a:lnSpc>
+                <a:spcPct val="150000"/>
+              </a:lnSpc>
+              <a:buFont typeface="Arial"/>
+              <a:buChar char="•"/>
+            </a:pPr>
+            <a:r>
+              <a:rPr lang="en-US" sz="2000" dirty="0" err="1">
                 <a:solidFill>
                   <a:srgbClr val="121212"/>
                 </a:solidFill>
                 <a:ea typeface="+mn-lt"/>
                 <a:cs typeface="+mn-lt"/>
               </a:rPr>
-              <a:t>: sql_ulesanded_3.txt</a:t>
+              <a:t>Iseseisvalt</a:t>
+            </a:r>
+            <a:r>
+              <a:rPr lang="en-US" sz="2000" dirty="0">
+                <a:solidFill>
+                  <a:srgbClr val="121212"/>
+                </a:solidFill>
+                <a:ea typeface="+mn-lt"/>
+                <a:cs typeface="+mn-lt"/>
+              </a:rPr>
+              <a:t>: sql_ulesanded_3_iseseisev.txt</a:t>
             </a:r>
           </a:p>
           <a:p>
-            <a:endParaRPr lang="en-US">
+            <a:pPr marL="285750" indent="-285750">
+              <a:lnSpc>
+                <a:spcPct val="150000"/>
+              </a:lnSpc>
+              <a:buFont typeface="Arial"/>
+              <a:buChar char="•"/>
+            </a:pPr>
+            <a:endParaRPr lang="en-US" sz="2000" dirty="0">
+              <a:solidFill>
+                <a:srgbClr val="121212"/>
+              </a:solidFill>
+              <a:ea typeface="+mn-lt"/>
+              <a:cs typeface="+mn-lt"/>
+            </a:endParaRPr>
+          </a:p>
+          <a:p>
+            <a:endParaRPr lang="en-US" dirty="0">
               <a:ea typeface="Inter"/>
             </a:endParaRPr>
           </a:p>
@@ -24607,7 +25026,7 @@
 </p:sld>
 </file>
 
-<file path=ppt/slides/slide13.xml><?xml version="1.0" encoding="utf-8"?>
+<file path=ppt/slides/slide14.xml><?xml version="1.0" encoding="utf-8"?>
 <p:sld xmlns:a="http://schemas.openxmlformats.org/drawingml/2006/main" xmlns:r="http://schemas.openxmlformats.org/officeDocument/2006/relationships" xmlns:p="http://schemas.openxmlformats.org/presentationml/2006/main">
   <p:cSld>
     <p:spTree>
@@ -24754,7 +25173,7 @@
 </p:sld>
 </file>
 
-<file path=ppt/slides/slide14.xml><?xml version="1.0" encoding="utf-8"?>
+<file path=ppt/slides/slide15.xml><?xml version="1.0" encoding="utf-8"?>
 <p:sld xmlns:a="http://schemas.openxmlformats.org/drawingml/2006/main" xmlns:r="http://schemas.openxmlformats.org/officeDocument/2006/relationships" xmlns:p="http://schemas.openxmlformats.org/presentationml/2006/main">
   <p:cSld>
     <p:spTree>
@@ -24867,7 +25286,7 @@
 </p:sld>
 </file>
 
-<file path=ppt/slides/slide15.xml><?xml version="1.0" encoding="utf-8"?>
+<file path=ppt/slides/slide16.xml><?xml version="1.0" encoding="utf-8"?>
 <p:sld xmlns:a="http://schemas.openxmlformats.org/drawingml/2006/main" xmlns:r="http://schemas.openxmlformats.org/officeDocument/2006/relationships" xmlns:p="http://schemas.openxmlformats.org/presentationml/2006/main">
   <p:cSld>
     <p:spTree>
@@ -24969,7 +25388,7 @@
 </p:sld>
 </file>
 
-<file path=ppt/slides/slide16.xml><?xml version="1.0" encoding="utf-8"?>
+<file path=ppt/slides/slide17.xml><?xml version="1.0" encoding="utf-8"?>
 <p:sld xmlns:a="http://schemas.openxmlformats.org/drawingml/2006/main" xmlns:r="http://schemas.openxmlformats.org/officeDocument/2006/relationships" xmlns:p="http://schemas.openxmlformats.org/presentationml/2006/main">
   <p:cSld>
     <p:spTree>
@@ -25109,28 +25528,38 @@
               <a:buChar char="•"/>
             </a:pPr>
             <a:r>
-              <a:rPr lang="en-US" sz="2000" err="1">
+              <a:rPr lang="en-US" sz="2000" dirty="0">
                 <a:solidFill>
                   <a:srgbClr val="121212"/>
                 </a:solidFill>
                 <a:ea typeface="+mn-lt"/>
                 <a:cs typeface="+mn-lt"/>
               </a:rPr>
-              <a:t>Iseseisvalt</a:t>
-            </a:r>
-            <a:r>
-              <a:rPr lang="en-US" sz="2000">
+              <a:t>Teeme </a:t>
+            </a:r>
+            <a:r>
+              <a:rPr lang="en-US" sz="2000" dirty="0" err="1">
                 <a:solidFill>
                   <a:srgbClr val="121212"/>
                 </a:solidFill>
                 <a:ea typeface="+mn-lt"/>
                 <a:cs typeface="+mn-lt"/>
               </a:rPr>
+              <a:t>koos</a:t>
+            </a:r>
+            <a:r>
+              <a:rPr lang="en-US" sz="2000" dirty="0">
+                <a:solidFill>
+                  <a:srgbClr val="121212"/>
+                </a:solidFill>
+                <a:ea typeface="+mn-lt"/>
+                <a:cs typeface="+mn-lt"/>
+              </a:rPr>
               <a:t>: sql_ulesanded_4.txt</a:t>
             </a:r>
           </a:p>
           <a:p>
-            <a:endParaRPr lang="en-US">
+            <a:endParaRPr lang="en-US" dirty="0">
               <a:ea typeface="Inter"/>
             </a:endParaRPr>
           </a:p>
@@ -25140,1005 +25569,6 @@
     <p:extLst>
       <p:ext uri="{BB962C8B-B14F-4D97-AF65-F5344CB8AC3E}">
         <p14:creationId xmlns:p14="http://schemas.microsoft.com/office/powerpoint/2010/main" val="3628489419"/>
-      </p:ext>
-    </p:extLst>
-  </p:cSld>
-  <p:clrMapOvr>
-    <a:masterClrMapping/>
-  </p:clrMapOvr>
-</p:sld>
-</file>
-
-<file path=ppt/slides/slide17.xml><?xml version="1.0" encoding="utf-8"?>
-<p:sld xmlns:a="http://schemas.openxmlformats.org/drawingml/2006/main" xmlns:r="http://schemas.openxmlformats.org/officeDocument/2006/relationships" xmlns:p="http://schemas.openxmlformats.org/presentationml/2006/main">
-  <p:cSld>
-    <p:spTree>
-      <p:nvGrpSpPr>
-        <p:cNvPr id="1" name="">
-          <a:extLst>
-            <a:ext uri="{FF2B5EF4-FFF2-40B4-BE49-F238E27FC236}">
-              <a16:creationId xmlns:a16="http://schemas.microsoft.com/office/drawing/2014/main" id="{F85E66BC-8679-220F-7F9D-6A113CD42F31}"/>
-            </a:ext>
-          </a:extLst>
-        </p:cNvPr>
-        <p:cNvGrpSpPr/>
-        <p:nvPr/>
-      </p:nvGrpSpPr>
-      <p:grpSpPr>
-        <a:xfrm>
-          <a:off x="0" y="0"/>
-          <a:ext cx="0" cy="0"/>
-          <a:chOff x="0" y="0"/>
-          <a:chExt cx="0" cy="0"/>
-        </a:xfrm>
-      </p:grpSpPr>
-      <p:sp>
-        <p:nvSpPr>
-          <p:cNvPr id="2" name="Title 1">
-            <a:extLst>
-              <a:ext uri="{FF2B5EF4-FFF2-40B4-BE49-F238E27FC236}">
-                <a16:creationId xmlns:a16="http://schemas.microsoft.com/office/drawing/2014/main" id="{DB0A2DA2-D9BB-347E-6673-353548C6AA28}"/>
-              </a:ext>
-            </a:extLst>
-          </p:cNvPr>
-          <p:cNvSpPr>
-            <a:spLocks noGrp="1"/>
-          </p:cNvSpPr>
-          <p:nvPr>
-            <p:ph type="ctrTitle"/>
-          </p:nvPr>
-        </p:nvSpPr>
-        <p:spPr/>
-        <p:txBody>
-          <a:bodyPr/>
-          <a:lstStyle/>
-          <a:p>
-            <a:r>
-              <a:rPr lang="en-US"/>
-              <a:t>SQL –   </a:t>
-            </a:r>
-            <a:r>
-              <a:rPr lang="en-US" err="1"/>
-              <a:t>tabelite</a:t>
-            </a:r>
-            <a:r>
-              <a:rPr lang="en-US"/>
-              <a:t> </a:t>
-            </a:r>
-            <a:r>
-              <a:rPr lang="en-US" err="1"/>
-              <a:t>ühendamine</a:t>
-            </a:r>
-            <a:r>
-              <a:rPr lang="en-US"/>
-              <a:t> - </a:t>
-            </a:r>
-            <a:r>
-              <a:rPr lang="en-US" err="1"/>
-              <a:t>vaatame</a:t>
-            </a:r>
-            <a:r>
-              <a:rPr lang="en-US"/>
-              <a:t> </a:t>
-            </a:r>
-            <a:r>
-              <a:rPr lang="en-US" err="1"/>
-              <a:t>koos</a:t>
-            </a:r>
-            <a:r>
-              <a:rPr lang="en-US"/>
-              <a:t> </a:t>
-            </a:r>
-            <a:r>
-              <a:rPr lang="en-US" err="1"/>
-              <a:t>lahendused</a:t>
-            </a:r>
-            <a:r>
-              <a:rPr lang="en-US"/>
-              <a:t> </a:t>
-            </a:r>
-            <a:r>
-              <a:rPr lang="en-US" err="1"/>
-              <a:t>üle</a:t>
-            </a:r>
-            <a:endParaRPr lang="en-US"/>
-          </a:p>
-        </p:txBody>
-      </p:sp>
-      <p:sp>
-        <p:nvSpPr>
-          <p:cNvPr id="3" name="Content Placeholder 2">
-            <a:extLst>
-              <a:ext uri="{FF2B5EF4-FFF2-40B4-BE49-F238E27FC236}">
-                <a16:creationId xmlns:a16="http://schemas.microsoft.com/office/drawing/2014/main" id="{FC1C4185-F479-EE0E-8349-28BDEEF52E4F}"/>
-              </a:ext>
-            </a:extLst>
-          </p:cNvPr>
-          <p:cNvSpPr>
-            <a:spLocks noGrp="1"/>
-          </p:cNvSpPr>
-          <p:nvPr>
-            <p:ph sz="quarter" idx="10"/>
-          </p:nvPr>
-        </p:nvSpPr>
-        <p:spPr/>
-        <p:txBody>
-          <a:bodyPr/>
-          <a:lstStyle/>
-          <a:p>
-            <a:pPr>
-              <a:lnSpc>
-                <a:spcPct val="150000"/>
-              </a:lnSpc>
-            </a:pPr>
-            <a:endParaRPr lang="en-US" sz="2400"/>
-          </a:p>
-          <a:p>
-            <a:pPr>
-              <a:lnSpc>
-                <a:spcPct val="150000"/>
-              </a:lnSpc>
-            </a:pPr>
-            <a:endParaRPr lang="en-US" sz="2400"/>
-          </a:p>
-        </p:txBody>
-      </p:sp>
-    </p:spTree>
-    <p:extLst>
-      <p:ext uri="{BB962C8B-B14F-4D97-AF65-F5344CB8AC3E}">
-        <p14:creationId xmlns:p14="http://schemas.microsoft.com/office/powerpoint/2010/main" val="897385100"/>
-      </p:ext>
-    </p:extLst>
-  </p:cSld>
-  <p:clrMapOvr>
-    <a:masterClrMapping/>
-  </p:clrMapOvr>
-</p:sld>
-</file>
-
-<file path=ppt/slides/slide18.xml><?xml version="1.0" encoding="utf-8"?>
-<p:sld xmlns:a="http://schemas.openxmlformats.org/drawingml/2006/main" xmlns:r="http://schemas.openxmlformats.org/officeDocument/2006/relationships" xmlns:p="http://schemas.openxmlformats.org/presentationml/2006/main">
-  <p:cSld>
-    <p:spTree>
-      <p:nvGrpSpPr>
-        <p:cNvPr id="1" name="">
-          <a:extLst>
-            <a:ext uri="{FF2B5EF4-FFF2-40B4-BE49-F238E27FC236}">
-              <a16:creationId xmlns:a16="http://schemas.microsoft.com/office/drawing/2014/main" id="{5677A8FE-19F6-9C13-4D99-8744F249B654}"/>
-            </a:ext>
-          </a:extLst>
-        </p:cNvPr>
-        <p:cNvGrpSpPr/>
-        <p:nvPr/>
-      </p:nvGrpSpPr>
-      <p:grpSpPr>
-        <a:xfrm>
-          <a:off x="0" y="0"/>
-          <a:ext cx="0" cy="0"/>
-          <a:chOff x="0" y="0"/>
-          <a:chExt cx="0" cy="0"/>
-        </a:xfrm>
-      </p:grpSpPr>
-      <p:sp>
-        <p:nvSpPr>
-          <p:cNvPr id="2" name="Title 1">
-            <a:extLst>
-              <a:ext uri="{FF2B5EF4-FFF2-40B4-BE49-F238E27FC236}">
-                <a16:creationId xmlns:a16="http://schemas.microsoft.com/office/drawing/2014/main" id="{B8699A78-8BE3-B792-DDB1-AE1AB18FA473}"/>
-              </a:ext>
-            </a:extLst>
-          </p:cNvPr>
-          <p:cNvSpPr>
-            <a:spLocks noGrp="1"/>
-          </p:cNvSpPr>
-          <p:nvPr>
-            <p:ph type="ctrTitle"/>
-          </p:nvPr>
-        </p:nvSpPr>
-        <p:spPr/>
-        <p:txBody>
-          <a:bodyPr/>
-          <a:lstStyle/>
-          <a:p>
-            <a:r>
-              <a:rPr lang="en-US"/>
-              <a:t>SQL –  </a:t>
-            </a:r>
-            <a:r>
-              <a:rPr lang="en-US" err="1"/>
-              <a:t>päringu</a:t>
-            </a:r>
-            <a:r>
-              <a:rPr lang="en-US"/>
-              <a:t> </a:t>
-            </a:r>
-            <a:r>
-              <a:rPr lang="en-US" err="1"/>
-              <a:t>teostamise</a:t>
-            </a:r>
-            <a:r>
-              <a:rPr lang="en-US"/>
-              <a:t> </a:t>
-            </a:r>
-            <a:r>
-              <a:rPr lang="en-US" err="1"/>
-              <a:t>järjekord</a:t>
-            </a:r>
-          </a:p>
-        </p:txBody>
-      </p:sp>
-      <p:sp>
-        <p:nvSpPr>
-          <p:cNvPr id="5" name="Content Placeholder 4">
-            <a:extLst>
-              <a:ext uri="{FF2B5EF4-FFF2-40B4-BE49-F238E27FC236}">
-                <a16:creationId xmlns:a16="http://schemas.microsoft.com/office/drawing/2014/main" id="{CFC55C9B-B86D-AF94-D837-6292B30A4552}"/>
-              </a:ext>
-            </a:extLst>
-          </p:cNvPr>
-          <p:cNvSpPr>
-            <a:spLocks noGrp="1"/>
-          </p:cNvSpPr>
-          <p:nvPr>
-            <p:ph sz="quarter" idx="10"/>
-          </p:nvPr>
-        </p:nvSpPr>
-        <p:spPr/>
-        <p:txBody>
-          <a:bodyPr/>
-          <a:lstStyle/>
-          <a:p>
-            <a:pPr marL="0" indent="0">
-              <a:buNone/>
-            </a:pPr>
-            <a:r>
-              <a:rPr lang="en-US">
-                <a:ea typeface="Inter"/>
-              </a:rPr>
-              <a:t>1. FROM/JOIN </a:t>
-            </a:r>
-          </a:p>
-          <a:p>
-            <a:pPr lvl="1">
-              <a:buFont typeface="Wingdings" panose="020B0502030000000004" pitchFamily="34" charset="0"/>
-              <a:buChar char="Ø"/>
-            </a:pPr>
-            <a:r>
-              <a:rPr lang="en-US" err="1">
-                <a:ea typeface="Inter"/>
-              </a:rPr>
-              <a:t>Defineerib</a:t>
-            </a:r>
-            <a:r>
-              <a:rPr lang="en-US">
-                <a:ea typeface="Inter"/>
-              </a:rPr>
-              <a:t>, </a:t>
-            </a:r>
-            <a:r>
-              <a:rPr lang="en-US" err="1">
-                <a:ea typeface="Inter"/>
-              </a:rPr>
-              <a:t>milliseid</a:t>
-            </a:r>
-            <a:r>
-              <a:rPr lang="en-US">
-                <a:ea typeface="Inter"/>
-              </a:rPr>
-              <a:t> </a:t>
-            </a:r>
-            <a:r>
-              <a:rPr lang="en-US" err="1">
-                <a:ea typeface="Inter"/>
-              </a:rPr>
-              <a:t>tabeleid</a:t>
-            </a:r>
-            <a:r>
-              <a:rPr lang="en-US">
-                <a:ea typeface="Inter"/>
-              </a:rPr>
-              <a:t> </a:t>
-            </a:r>
-            <a:r>
-              <a:rPr lang="en-US" err="1">
-                <a:ea typeface="Inter"/>
-              </a:rPr>
-              <a:t>kasutatakse</a:t>
-            </a:r>
-            <a:r>
-              <a:rPr lang="en-US">
-                <a:ea typeface="Inter"/>
-              </a:rPr>
-              <a:t>.</a:t>
-            </a:r>
-          </a:p>
-          <a:p>
-            <a:pPr marL="0" indent="0">
-              <a:buNone/>
-            </a:pPr>
-            <a:r>
-              <a:rPr lang="en-US">
-                <a:ea typeface="Inter"/>
-              </a:rPr>
-              <a:t>2. WHERE </a:t>
-            </a:r>
-          </a:p>
-          <a:p>
-            <a:pPr lvl="1">
-              <a:buFont typeface="Wingdings" panose="020B0502030000000004" pitchFamily="34" charset="0"/>
-              <a:buChar char="Ø"/>
-            </a:pPr>
-            <a:r>
-              <a:rPr lang="en-US" err="1">
-                <a:ea typeface="Inter"/>
-              </a:rPr>
-              <a:t>Filtreerib</a:t>
-            </a:r>
-            <a:r>
-              <a:rPr lang="en-US">
-                <a:ea typeface="Inter"/>
-              </a:rPr>
-              <a:t> </a:t>
-            </a:r>
-            <a:r>
-              <a:rPr lang="en-US" err="1">
-                <a:ea typeface="Inter"/>
-              </a:rPr>
-              <a:t>välja</a:t>
-            </a:r>
-            <a:r>
-              <a:rPr lang="en-US">
-                <a:ea typeface="Inter"/>
-              </a:rPr>
-              <a:t> </a:t>
-            </a:r>
-            <a:r>
-              <a:rPr lang="en-US" err="1">
-                <a:ea typeface="Inter"/>
-              </a:rPr>
-              <a:t>andmeread</a:t>
-            </a:r>
-            <a:r>
-              <a:rPr lang="en-US">
-                <a:ea typeface="Inter"/>
-              </a:rPr>
-              <a:t>, mis </a:t>
-            </a:r>
-            <a:r>
-              <a:rPr lang="en-US" err="1">
-                <a:ea typeface="Inter"/>
-              </a:rPr>
-              <a:t>ei</a:t>
-            </a:r>
-            <a:r>
-              <a:rPr lang="en-US">
-                <a:ea typeface="Inter"/>
-              </a:rPr>
-              <a:t> </a:t>
-            </a:r>
-            <a:r>
-              <a:rPr lang="en-US" err="1">
-                <a:ea typeface="Inter"/>
-              </a:rPr>
-              <a:t>vasta</a:t>
-            </a:r>
-            <a:r>
-              <a:rPr lang="en-US">
-                <a:ea typeface="Inter"/>
-              </a:rPr>
-              <a:t> </a:t>
-            </a:r>
-            <a:r>
-              <a:rPr lang="en-US" err="1">
-                <a:ea typeface="Inter"/>
-              </a:rPr>
-              <a:t>tingimustele</a:t>
-            </a:r>
-            <a:r>
-              <a:rPr lang="en-US">
-                <a:ea typeface="Inter"/>
-              </a:rPr>
-              <a:t>.</a:t>
-            </a:r>
-            <a:endParaRPr lang="en-US"/>
-          </a:p>
-          <a:p>
-            <a:pPr marL="0" indent="0">
-              <a:buNone/>
-            </a:pPr>
-            <a:r>
-              <a:rPr lang="en-US">
-                <a:ea typeface="Inter"/>
-              </a:rPr>
-              <a:t>3. GROUP BY </a:t>
-            </a:r>
-          </a:p>
-          <a:p>
-            <a:pPr lvl="1">
-              <a:buFont typeface="Wingdings" panose="020B0502030000000004" pitchFamily="34" charset="0"/>
-              <a:buChar char="Ø"/>
-            </a:pPr>
-            <a:r>
-              <a:rPr lang="en-US" err="1">
-                <a:ea typeface="Inter"/>
-              </a:rPr>
-              <a:t>Grupeerib</a:t>
-            </a:r>
-            <a:r>
-              <a:rPr lang="en-US">
-                <a:ea typeface="Inter"/>
-              </a:rPr>
-              <a:t> </a:t>
-            </a:r>
-            <a:r>
-              <a:rPr lang="en-US" err="1">
-                <a:ea typeface="Inter"/>
-              </a:rPr>
-              <a:t>andmeread</a:t>
-            </a:r>
-            <a:r>
-              <a:rPr lang="en-US">
-                <a:ea typeface="Inter"/>
-              </a:rPr>
-              <a:t>.</a:t>
-            </a:r>
-            <a:endParaRPr lang="en-US"/>
-          </a:p>
-          <a:p>
-            <a:pPr marL="0" indent="0">
-              <a:buNone/>
-            </a:pPr>
-            <a:r>
-              <a:rPr lang="en-US">
-                <a:ea typeface="Inter"/>
-              </a:rPr>
-              <a:t>4. HAVING </a:t>
-            </a:r>
-          </a:p>
-          <a:p>
-            <a:pPr marL="800100" lvl="1">
-              <a:buFont typeface="Wingdings" panose="020B0502030000000004" pitchFamily="34" charset="0"/>
-              <a:buChar char="Ø"/>
-            </a:pPr>
-            <a:r>
-              <a:rPr lang="en-US" err="1">
-                <a:ea typeface="Inter"/>
-              </a:rPr>
-              <a:t>Filtreerib</a:t>
-            </a:r>
-            <a:r>
-              <a:rPr lang="en-US">
-                <a:ea typeface="Inter"/>
-              </a:rPr>
-              <a:t> </a:t>
-            </a:r>
-            <a:r>
-              <a:rPr lang="en-US" err="1">
-                <a:ea typeface="Inter"/>
-              </a:rPr>
-              <a:t>välja</a:t>
-            </a:r>
-            <a:r>
-              <a:rPr lang="en-US">
-                <a:ea typeface="Inter"/>
-              </a:rPr>
-              <a:t> </a:t>
-            </a:r>
-            <a:r>
-              <a:rPr lang="en-US" err="1">
-                <a:ea typeface="Inter"/>
-              </a:rPr>
-              <a:t>grupeeritud</a:t>
-            </a:r>
-            <a:r>
-              <a:rPr lang="en-US">
-                <a:ea typeface="Inter"/>
-              </a:rPr>
-              <a:t> </a:t>
-            </a:r>
-            <a:r>
-              <a:rPr lang="en-US" err="1">
-                <a:ea typeface="Inter"/>
-              </a:rPr>
-              <a:t>andmeread</a:t>
-            </a:r>
-            <a:r>
-              <a:rPr lang="en-US">
-                <a:ea typeface="Inter"/>
-              </a:rPr>
-              <a:t>, mis </a:t>
-            </a:r>
-            <a:r>
-              <a:rPr lang="en-US" err="1">
-                <a:ea typeface="Inter"/>
-              </a:rPr>
-              <a:t>ei</a:t>
-            </a:r>
-            <a:r>
-              <a:rPr lang="en-US">
-                <a:ea typeface="Inter"/>
-              </a:rPr>
-              <a:t> </a:t>
-            </a:r>
-            <a:r>
-              <a:rPr lang="en-US" err="1">
-                <a:ea typeface="Inter"/>
-              </a:rPr>
-              <a:t>vasta</a:t>
-            </a:r>
-            <a:r>
-              <a:rPr lang="en-US">
-                <a:ea typeface="Inter"/>
-              </a:rPr>
-              <a:t> </a:t>
-            </a:r>
-            <a:r>
-              <a:rPr lang="en-US" err="1">
-                <a:ea typeface="Inter"/>
-              </a:rPr>
-              <a:t>tingimustele</a:t>
-            </a:r>
-            <a:r>
-              <a:rPr lang="en-US">
-                <a:ea typeface="Inter"/>
-              </a:rPr>
-              <a:t>.</a:t>
-            </a:r>
-          </a:p>
-          <a:p>
-            <a:pPr marL="0" indent="0">
-              <a:buNone/>
-            </a:pPr>
-            <a:r>
-              <a:rPr lang="en-US">
-                <a:ea typeface="Inter"/>
-              </a:rPr>
-              <a:t>5. SELECT </a:t>
-            </a:r>
-          </a:p>
-          <a:p>
-            <a:pPr marL="800100" lvl="1">
-              <a:buFont typeface="Wingdings" panose="020B0502030000000004" pitchFamily="34" charset="0"/>
-              <a:buChar char="Ø"/>
-            </a:pPr>
-            <a:r>
-              <a:rPr lang="en-US" err="1">
-                <a:ea typeface="Inter"/>
-              </a:rPr>
-              <a:t>Valib</a:t>
-            </a:r>
-            <a:r>
-              <a:rPr lang="en-US">
-                <a:ea typeface="Inter"/>
-              </a:rPr>
-              <a:t> </a:t>
-            </a:r>
-            <a:r>
-              <a:rPr lang="en-US" err="1">
-                <a:ea typeface="Inter"/>
-              </a:rPr>
-              <a:t>tulbad</a:t>
-            </a:r>
-            <a:r>
-              <a:rPr lang="en-US">
-                <a:ea typeface="Inter"/>
-              </a:rPr>
-              <a:t>, </a:t>
-            </a:r>
-            <a:r>
-              <a:rPr lang="en-US" err="1">
-                <a:ea typeface="Inter"/>
-              </a:rPr>
-              <a:t>mida</a:t>
-            </a:r>
-            <a:r>
-              <a:rPr lang="en-US">
-                <a:ea typeface="Inter"/>
-              </a:rPr>
-              <a:t> </a:t>
-            </a:r>
-            <a:r>
-              <a:rPr lang="en-US" err="1">
-                <a:ea typeface="Inter"/>
-              </a:rPr>
-              <a:t>näidata</a:t>
-            </a:r>
-            <a:r>
-              <a:rPr lang="en-US">
-                <a:ea typeface="Inter"/>
-              </a:rPr>
-              <a:t>.</a:t>
-            </a:r>
-          </a:p>
-          <a:p>
-            <a:pPr marL="0" indent="0">
-              <a:buNone/>
-            </a:pPr>
-            <a:r>
-              <a:rPr lang="en-US">
-                <a:ea typeface="Inter"/>
-              </a:rPr>
-              <a:t>6. ORDER BY </a:t>
-            </a:r>
-          </a:p>
-          <a:p>
-            <a:pPr marL="800100" lvl="1">
-              <a:buClr>
-                <a:srgbClr val="121212"/>
-              </a:buClr>
-              <a:buFont typeface="Wingdings" panose="020B0502030000000004" pitchFamily="34" charset="0"/>
-              <a:buChar char="Ø"/>
-            </a:pPr>
-            <a:r>
-              <a:rPr lang="en-US" err="1">
-                <a:ea typeface="Inter"/>
-              </a:rPr>
-              <a:t>Sorteerib</a:t>
-            </a:r>
-            <a:r>
-              <a:rPr lang="en-US">
-                <a:ea typeface="Inter"/>
-              </a:rPr>
-              <a:t> </a:t>
-            </a:r>
-            <a:r>
-              <a:rPr lang="en-US" err="1">
-                <a:ea typeface="Inter"/>
-              </a:rPr>
-              <a:t>valitud</a:t>
-            </a:r>
-            <a:r>
-              <a:rPr lang="en-US">
-                <a:ea typeface="Inter"/>
-              </a:rPr>
-              <a:t> </a:t>
-            </a:r>
-            <a:r>
-              <a:rPr lang="en-US" err="1">
-                <a:ea typeface="Inter"/>
-              </a:rPr>
-              <a:t>andmeread</a:t>
-            </a:r>
-            <a:r>
-              <a:rPr lang="en-US">
-                <a:ea typeface="Inter"/>
-              </a:rPr>
-              <a:t>.</a:t>
-            </a:r>
-            <a:endParaRPr lang="en-US"/>
-          </a:p>
-          <a:p>
-            <a:pPr marL="0" indent="0">
-              <a:buNone/>
-            </a:pPr>
-            <a:r>
-              <a:rPr lang="en-US">
-                <a:ea typeface="Inter"/>
-              </a:rPr>
-              <a:t>7. LIMIT</a:t>
-            </a:r>
-          </a:p>
-          <a:p>
-            <a:pPr marL="800100" lvl="1">
-              <a:buFont typeface="Wingdings" panose="020B0502030000000004" pitchFamily="34" charset="0"/>
-              <a:buChar char="Ø"/>
-            </a:pPr>
-            <a:r>
-              <a:rPr lang="en-US" err="1">
-                <a:ea typeface="Inter"/>
-              </a:rPr>
-              <a:t>Jätab</a:t>
-            </a:r>
-            <a:r>
-              <a:rPr lang="en-US">
-                <a:ea typeface="Inter"/>
-              </a:rPr>
-              <a:t> </a:t>
-            </a:r>
-            <a:r>
-              <a:rPr lang="en-US" err="1">
-                <a:ea typeface="Inter"/>
-              </a:rPr>
-              <a:t>alles</a:t>
-            </a:r>
-            <a:r>
-              <a:rPr lang="en-US">
-                <a:ea typeface="Inter"/>
-              </a:rPr>
-              <a:t> </a:t>
-            </a:r>
-            <a:r>
-              <a:rPr lang="en-US" err="1">
-                <a:ea typeface="Inter"/>
-              </a:rPr>
-              <a:t>ainult</a:t>
-            </a:r>
-            <a:r>
-              <a:rPr lang="en-US">
-                <a:ea typeface="Inter"/>
-              </a:rPr>
-              <a:t> </a:t>
-            </a:r>
-            <a:r>
-              <a:rPr lang="en-US" err="1">
-                <a:ea typeface="Inter"/>
-              </a:rPr>
-              <a:t>täpsustatud</a:t>
-            </a:r>
-            <a:r>
-              <a:rPr lang="en-US">
-                <a:ea typeface="Inter"/>
-              </a:rPr>
-              <a:t> </a:t>
-            </a:r>
-            <a:r>
-              <a:rPr lang="en-US" err="1">
-                <a:ea typeface="Inter"/>
-              </a:rPr>
-              <a:t>arvu</a:t>
-            </a:r>
-            <a:r>
-              <a:rPr lang="en-US">
-                <a:ea typeface="Inter"/>
-              </a:rPr>
-              <a:t> </a:t>
-            </a:r>
-            <a:r>
-              <a:rPr lang="en-US" err="1">
-                <a:ea typeface="Inter"/>
-              </a:rPr>
-              <a:t>ridu</a:t>
-            </a:r>
-            <a:r>
-              <a:rPr lang="en-US">
-                <a:ea typeface="Inter"/>
-              </a:rPr>
-              <a:t>.</a:t>
-            </a:r>
-            <a:endParaRPr lang="en-US"/>
-          </a:p>
-          <a:p>
-            <a:pPr marL="800100" lvl="1">
-              <a:buFont typeface="Wingdings" panose="020B0502030000000004" pitchFamily="34" charset="0"/>
-              <a:buChar char="Ø"/>
-            </a:pPr>
-            <a:endParaRPr lang="en-US"/>
-          </a:p>
-          <a:p>
-            <a:pPr marL="285750" indent="-285750">
-              <a:buClr>
-                <a:srgbClr val="121212"/>
-              </a:buClr>
-            </a:pPr>
-            <a:r>
-              <a:rPr lang="en-US" err="1">
-                <a:ea typeface="Inter"/>
-              </a:rPr>
-              <a:t>Teostamise</a:t>
-            </a:r>
-            <a:r>
-              <a:rPr lang="en-US">
-                <a:ea typeface="Inter"/>
-              </a:rPr>
-              <a:t> </a:t>
-            </a:r>
-            <a:r>
-              <a:rPr lang="en-US" err="1">
-                <a:ea typeface="Inter"/>
-              </a:rPr>
-              <a:t>järjekord</a:t>
-            </a:r>
-            <a:r>
-              <a:rPr lang="en-US">
-                <a:ea typeface="Inter"/>
-              </a:rPr>
-              <a:t> </a:t>
-            </a:r>
-            <a:r>
-              <a:rPr lang="en-US" err="1">
-                <a:ea typeface="Inter"/>
-              </a:rPr>
-              <a:t>muutub</a:t>
-            </a:r>
-            <a:r>
-              <a:rPr lang="en-US">
-                <a:ea typeface="Inter"/>
-              </a:rPr>
-              <a:t> </a:t>
-            </a:r>
-            <a:r>
-              <a:rPr lang="en-US" err="1">
-                <a:ea typeface="Inter"/>
-              </a:rPr>
-              <a:t>oluliseks</a:t>
-            </a:r>
-            <a:r>
-              <a:rPr lang="en-US">
-                <a:ea typeface="Inter"/>
-              </a:rPr>
-              <a:t> </a:t>
-            </a:r>
-            <a:r>
-              <a:rPr lang="en-US" err="1">
-                <a:ea typeface="Inter"/>
-              </a:rPr>
-              <a:t>suuremate</a:t>
-            </a:r>
-            <a:r>
-              <a:rPr lang="en-US">
-                <a:ea typeface="Inter"/>
-              </a:rPr>
-              <a:t> </a:t>
-            </a:r>
-            <a:r>
-              <a:rPr lang="en-US" err="1">
-                <a:ea typeface="Inter"/>
-              </a:rPr>
-              <a:t>päringute</a:t>
-            </a:r>
-            <a:r>
-              <a:rPr lang="en-US">
-                <a:ea typeface="Inter"/>
-              </a:rPr>
-              <a:t> </a:t>
-            </a:r>
-            <a:r>
-              <a:rPr lang="en-US" err="1">
-                <a:ea typeface="Inter"/>
-              </a:rPr>
-              <a:t>puhul</a:t>
-            </a:r>
-            <a:r>
-              <a:rPr lang="en-US">
-                <a:ea typeface="Inter"/>
-              </a:rPr>
-              <a:t>. Mida </a:t>
-            </a:r>
-            <a:r>
-              <a:rPr lang="en-US" err="1">
-                <a:ea typeface="Inter"/>
-              </a:rPr>
-              <a:t>varasemas</a:t>
-            </a:r>
-            <a:r>
-              <a:rPr lang="en-US">
-                <a:ea typeface="Inter"/>
-              </a:rPr>
-              <a:t> </a:t>
-            </a:r>
-            <a:r>
-              <a:rPr lang="en-US" err="1">
-                <a:ea typeface="Inter"/>
-              </a:rPr>
-              <a:t>sammus</a:t>
-            </a:r>
-            <a:r>
-              <a:rPr lang="en-US">
-                <a:ea typeface="Inter"/>
-              </a:rPr>
-              <a:t> </a:t>
-            </a:r>
-            <a:r>
-              <a:rPr lang="en-US" err="1">
-                <a:ea typeface="Inter"/>
-              </a:rPr>
-              <a:t>saad</a:t>
-            </a:r>
-            <a:r>
-              <a:rPr lang="en-US">
-                <a:ea typeface="Inter"/>
-              </a:rPr>
-              <a:t> </a:t>
-            </a:r>
-            <a:r>
-              <a:rPr lang="en-US" err="1">
-                <a:ea typeface="Inter"/>
-              </a:rPr>
-              <a:t>päringu</a:t>
-            </a:r>
-            <a:r>
-              <a:rPr lang="en-US">
-                <a:ea typeface="Inter"/>
-              </a:rPr>
-              <a:t> </a:t>
-            </a:r>
-            <a:r>
-              <a:rPr lang="en-US" err="1">
-                <a:ea typeface="Inter"/>
-              </a:rPr>
-              <a:t>tulemusi</a:t>
-            </a:r>
-            <a:r>
-              <a:rPr lang="en-US">
-                <a:ea typeface="Inter"/>
-              </a:rPr>
-              <a:t> </a:t>
-            </a:r>
-            <a:r>
-              <a:rPr lang="en-US" err="1">
-                <a:ea typeface="Inter"/>
-              </a:rPr>
-              <a:t>piirata</a:t>
-            </a:r>
-            <a:r>
-              <a:rPr lang="en-US">
-                <a:ea typeface="Inter"/>
-              </a:rPr>
-              <a:t>, </a:t>
-            </a:r>
-            <a:r>
-              <a:rPr lang="en-US" err="1">
-                <a:ea typeface="Inter"/>
-              </a:rPr>
-              <a:t>seda</a:t>
-            </a:r>
-            <a:r>
-              <a:rPr lang="en-US">
-                <a:ea typeface="Inter"/>
-              </a:rPr>
-              <a:t> </a:t>
-            </a:r>
-            <a:r>
-              <a:rPr lang="en-US" err="1">
-                <a:ea typeface="Inter"/>
-              </a:rPr>
-              <a:t>optimaalsem</a:t>
-            </a:r>
-            <a:r>
-              <a:rPr lang="en-US">
-                <a:ea typeface="Inter"/>
-              </a:rPr>
-              <a:t> (</a:t>
-            </a:r>
-            <a:r>
-              <a:rPr lang="en-US" err="1">
-                <a:ea typeface="Inter"/>
-              </a:rPr>
-              <a:t>kiirem</a:t>
-            </a:r>
-            <a:r>
-              <a:rPr lang="en-US">
-                <a:ea typeface="Inter"/>
-              </a:rPr>
-              <a:t>) on </a:t>
-            </a:r>
-            <a:r>
-              <a:rPr lang="en-US" err="1">
-                <a:ea typeface="Inter"/>
-              </a:rPr>
-              <a:t>päringu</a:t>
-            </a:r>
-            <a:r>
-              <a:rPr lang="en-US">
-                <a:ea typeface="Inter"/>
-              </a:rPr>
-              <a:t> </a:t>
-            </a:r>
-            <a:r>
-              <a:rPr lang="en-US" err="1">
-                <a:ea typeface="Inter"/>
-              </a:rPr>
-              <a:t>teostus</a:t>
-            </a:r>
-            <a:r>
-              <a:rPr lang="en-US">
-                <a:ea typeface="Inter"/>
-              </a:rPr>
-              <a:t>.</a:t>
-            </a:r>
-            <a:endParaRPr lang="en-US"/>
-          </a:p>
-          <a:p>
-            <a:endParaRPr lang="en-US">
-              <a:cs typeface="+mn-lt"/>
-            </a:endParaRPr>
-          </a:p>
-        </p:txBody>
-      </p:sp>
-    </p:spTree>
-    <p:extLst>
-      <p:ext uri="{BB962C8B-B14F-4D97-AF65-F5344CB8AC3E}">
-        <p14:creationId xmlns:p14="http://schemas.microsoft.com/office/powerpoint/2010/main" val="3665876313"/>
       </p:ext>
     </p:extLst>
   </p:cSld>
@@ -28953,54 +28383,54 @@
               </a:lnSpc>
             </a:pPr>
             <a:r>
-              <a:rPr lang="en-US" sz="2400" err="1">
+              <a:rPr lang="en-US" sz="2400" dirty="0" err="1">
                 <a:ea typeface="Inter"/>
               </a:rPr>
               <a:t>Palju</a:t>
             </a:r>
             <a:r>
-              <a:rPr lang="en-US" sz="2400">
+              <a:rPr lang="en-US" sz="2400" dirty="0">
                 <a:ea typeface="Inter"/>
               </a:rPr>
               <a:t> </a:t>
             </a:r>
             <a:r>
-              <a:rPr lang="en-US" sz="2400" err="1">
+              <a:rPr lang="en-US" sz="2400" dirty="0" err="1">
                 <a:ea typeface="Inter"/>
               </a:rPr>
               <a:t>erinevaid</a:t>
             </a:r>
             <a:r>
-              <a:rPr lang="en-US" sz="2400">
+              <a:rPr lang="en-US" sz="2400" dirty="0">
                 <a:ea typeface="Inter"/>
               </a:rPr>
               <a:t>, </a:t>
             </a:r>
             <a:r>
-              <a:rPr lang="en-US" sz="2400" err="1">
+              <a:rPr lang="en-US" sz="2400" dirty="0" err="1">
                 <a:ea typeface="Inter"/>
               </a:rPr>
               <a:t>käsitleme</a:t>
             </a:r>
             <a:r>
-              <a:rPr lang="en-US" sz="2400">
+              <a:rPr lang="en-US" sz="2400" dirty="0">
                 <a:ea typeface="Inter"/>
               </a:rPr>
               <a:t> </a:t>
             </a:r>
             <a:r>
-              <a:rPr lang="en-US" sz="2400" err="1">
+              <a:rPr lang="en-US" sz="2400" dirty="0" err="1">
                 <a:ea typeface="Inter"/>
               </a:rPr>
               <a:t>kolme</a:t>
             </a:r>
             <a:r>
-              <a:rPr lang="en-US" sz="2400">
+              <a:rPr lang="en-US" sz="2400" dirty="0">
                 <a:ea typeface="Inter"/>
               </a:rPr>
               <a:t>: </a:t>
             </a:r>
-            <a:endParaRPr lang="en-US"/>
+            <a:endParaRPr lang="en-US" dirty="0"/>
           </a:p>
           <a:p>
             <a:pPr lvl="1">
@@ -29011,90 +28441,90 @@
               <a:buChar char="o"/>
             </a:pPr>
             <a:r>
-              <a:rPr lang="en-US" sz="2000" err="1">
+              <a:rPr lang="en-US" sz="2000" dirty="0" err="1">
                 <a:ea typeface="+mn-lt"/>
                 <a:cs typeface="+mn-lt"/>
               </a:rPr>
               <a:t>sqliteviz</a:t>
             </a:r>
             <a:r>
-              <a:rPr lang="en-US" sz="2000">
+              <a:rPr lang="en-US" sz="2000" dirty="0">
                 <a:ea typeface="+mn-lt"/>
                 <a:cs typeface="+mn-lt"/>
               </a:rPr>
               <a:t> - </a:t>
             </a:r>
             <a:r>
-              <a:rPr lang="en-US" sz="2000" err="1">
+              <a:rPr lang="en-US" sz="2000" dirty="0" err="1">
                 <a:ea typeface="+mn-lt"/>
                 <a:cs typeface="+mn-lt"/>
               </a:rPr>
               <a:t>tasuta</a:t>
             </a:r>
             <a:r>
-              <a:rPr lang="en-US" sz="2000">
+              <a:rPr lang="en-US" sz="2000" dirty="0">
                 <a:ea typeface="+mn-lt"/>
                 <a:cs typeface="+mn-lt"/>
               </a:rPr>
               <a:t> </a:t>
             </a:r>
             <a:r>
-              <a:rPr lang="en-US" sz="2000" err="1">
+              <a:rPr lang="en-US" sz="2000" dirty="0" err="1">
                 <a:ea typeface="+mn-lt"/>
                 <a:cs typeface="+mn-lt"/>
               </a:rPr>
               <a:t>brauseris</a:t>
             </a:r>
             <a:r>
-              <a:rPr lang="en-US" sz="2000">
+              <a:rPr lang="en-US" sz="2000" dirty="0">
                 <a:ea typeface="+mn-lt"/>
                 <a:cs typeface="+mn-lt"/>
               </a:rPr>
               <a:t> </a:t>
             </a:r>
             <a:r>
-              <a:rPr lang="en-US" sz="2000" err="1">
+              <a:rPr lang="en-US" sz="2000" dirty="0" err="1">
                 <a:ea typeface="+mn-lt"/>
                 <a:cs typeface="+mn-lt"/>
               </a:rPr>
               <a:t>kasutatav</a:t>
             </a:r>
             <a:r>
-              <a:rPr lang="en-US" sz="2000">
+              <a:rPr lang="en-US" sz="2000" dirty="0">
                 <a:ea typeface="+mn-lt"/>
                 <a:cs typeface="+mn-lt"/>
               </a:rPr>
               <a:t> (</a:t>
             </a:r>
             <a:r>
-              <a:rPr lang="en-US" sz="2000" err="1">
+              <a:rPr lang="en-US" sz="2000" dirty="0" err="1">
                 <a:ea typeface="+mn-lt"/>
                 <a:cs typeface="+mn-lt"/>
               </a:rPr>
               <a:t>piiratud</a:t>
             </a:r>
             <a:r>
-              <a:rPr lang="en-US" sz="2000">
+              <a:rPr lang="en-US" sz="2000" dirty="0">
                 <a:ea typeface="+mn-lt"/>
                 <a:cs typeface="+mn-lt"/>
               </a:rPr>
               <a:t> </a:t>
             </a:r>
             <a:r>
-              <a:rPr lang="en-US" sz="2000" err="1">
+              <a:rPr lang="en-US" sz="2000" dirty="0" err="1">
                 <a:ea typeface="+mn-lt"/>
                 <a:cs typeface="+mn-lt"/>
               </a:rPr>
               <a:t>allikad</a:t>
             </a:r>
             <a:r>
-              <a:rPr lang="en-US" sz="2000">
+              <a:rPr lang="en-US" sz="2000" dirty="0">
                 <a:ea typeface="+mn-lt"/>
                 <a:cs typeface="+mn-lt"/>
               </a:rPr>
               <a:t> – CSV, JSON, NDJSON)</a:t>
             </a:r>
-            <a:endParaRPr lang="en-US" sz="2000">
+            <a:endParaRPr lang="en-US" sz="2000" dirty="0">
               <a:cs typeface="+mn-lt"/>
             </a:endParaRPr>
           </a:p>
@@ -29107,14 +28537,14 @@
               <a:buChar char="§"/>
             </a:pPr>
             <a:r>
-              <a:rPr lang="en-US" sz="2000">
+              <a:rPr lang="en-US" sz="2000" dirty="0">
                 <a:ea typeface="+mn-lt"/>
                 <a:cs typeface="+mn-lt"/>
                 <a:hlinkClick r:id="rId2"/>
               </a:rPr>
               <a:t>https://sqliteviz.com/</a:t>
             </a:r>
-            <a:endParaRPr lang="en-US" sz="2000"/>
+            <a:endParaRPr lang="en-US" sz="2000" dirty="0"/>
           </a:p>
           <a:p>
             <a:pPr lvl="1">
@@ -29125,84 +28555,72 @@
               <a:buChar char="o"/>
             </a:pPr>
             <a:r>
-              <a:rPr lang="en-US" sz="2000" err="1">
+              <a:rPr lang="en-US" sz="2000" dirty="0" err="1">
                 <a:ea typeface="Inter"/>
               </a:rPr>
               <a:t>DBeaver</a:t>
             </a:r>
             <a:r>
-              <a:rPr lang="en-US" sz="2000">
+              <a:rPr lang="en-US" sz="2000" dirty="0">
                 <a:ea typeface="Inter"/>
               </a:rPr>
               <a:t> Community – </a:t>
             </a:r>
             <a:r>
-              <a:rPr lang="en-US" sz="2000" err="1">
+              <a:rPr lang="en-US" sz="2000" dirty="0" err="1">
                 <a:ea typeface="Inter"/>
               </a:rPr>
               <a:t>tasuta</a:t>
             </a:r>
             <a:r>
-              <a:rPr lang="en-US" sz="2000">
+              <a:rPr lang="en-US" sz="2000" dirty="0">
                 <a:ea typeface="Inter"/>
               </a:rPr>
               <a:t> </a:t>
             </a:r>
             <a:r>
-              <a:rPr lang="en-US" sz="2000" err="1">
+              <a:rPr lang="en-US" sz="2000" dirty="0" err="1">
                 <a:ea typeface="Inter"/>
               </a:rPr>
               <a:t>andmebaasi</a:t>
             </a:r>
             <a:r>
-              <a:rPr lang="en-US" sz="2000">
+              <a:rPr lang="en-US" sz="2000" dirty="0">
                 <a:ea typeface="Inter"/>
               </a:rPr>
               <a:t> </a:t>
             </a:r>
             <a:r>
-              <a:rPr lang="en-US" sz="2000" err="1">
+              <a:rPr lang="en-US" sz="2000" dirty="0" err="1">
                 <a:ea typeface="Inter"/>
               </a:rPr>
               <a:t>haldusprogramm</a:t>
             </a:r>
             <a:r>
-              <a:rPr lang="en-US" sz="2000">
+              <a:rPr lang="en-US" sz="2000" dirty="0">
                 <a:ea typeface="Inter"/>
               </a:rPr>
               <a:t>, </a:t>
             </a:r>
             <a:r>
-              <a:rPr lang="en-US" sz="2000" err="1">
+              <a:rPr lang="en-US" sz="2000" dirty="0" err="1">
                 <a:ea typeface="Inter"/>
               </a:rPr>
               <a:t>vajalik</a:t>
             </a:r>
             <a:r>
-              <a:rPr lang="en-US" sz="2000">
+              <a:rPr lang="en-US" sz="2000" dirty="0">
                 <a:ea typeface="Inter"/>
               </a:rPr>
-              <a:t> </a:t>
-            </a:r>
-            <a:r>
-              <a:rPr lang="en-US" sz="2000" err="1">
+              <a:t> alla </a:t>
+            </a:r>
+            <a:r>
+              <a:rPr lang="en-US" sz="2000" dirty="0" err="1">
                 <a:ea typeface="Inter"/>
               </a:rPr>
-              <a:t>alla</a:t>
-            </a:r>
-            <a:r>
-              <a:rPr lang="en-US" sz="2000">
-                <a:ea typeface="Inter"/>
-              </a:rPr>
-              <a:t> </a:t>
-            </a:r>
-            <a:r>
-              <a:rPr lang="en-US" sz="2000" err="1">
-                <a:ea typeface="Inter"/>
-              </a:rPr>
               <a:t>laadida</a:t>
             </a:r>
-            <a:endParaRPr lang="en-US" sz="2000"/>
+            <a:endParaRPr lang="en-US" sz="2000" dirty="0"/>
           </a:p>
           <a:p>
             <a:pPr lvl="2">
@@ -29213,7 +28631,7 @@
               <a:buChar char="§"/>
             </a:pPr>
             <a:r>
-              <a:rPr lang="en-US" sz="2000">
+              <a:rPr lang="en-US" sz="2000" dirty="0">
                 <a:ea typeface="+mn-lt"/>
                 <a:cs typeface="+mn-lt"/>
                 <a:hlinkClick r:id="rId3"/>
@@ -29221,13 +28639,13 @@
               <a:t>https://dbeaver.io/</a:t>
             </a:r>
             <a:r>
-              <a:rPr lang="en-US" sz="2000">
+              <a:rPr lang="en-US" sz="2000" dirty="0">
                 <a:ea typeface="+mn-lt"/>
                 <a:cs typeface="+mn-lt"/>
               </a:rPr>
               <a:t> </a:t>
             </a:r>
-            <a:endParaRPr lang="en-US" sz="2000"/>
+            <a:endParaRPr lang="en-US" sz="2000" dirty="0"/>
           </a:p>
           <a:p>
             <a:pPr lvl="1">
@@ -29238,90 +28656,78 @@
               <a:buChar char="o"/>
             </a:pPr>
             <a:r>
-              <a:rPr lang="en-US" sz="2000">
+              <a:rPr lang="en-US" sz="2000" dirty="0">
                 <a:ea typeface="Inter"/>
               </a:rPr>
               <a:t>VS Code – </a:t>
             </a:r>
             <a:r>
-              <a:rPr lang="en-US" sz="2000" err="1">
+              <a:rPr lang="en-US" sz="2000" dirty="0" err="1">
                 <a:ea typeface="Inter"/>
               </a:rPr>
               <a:t>tasuta</a:t>
             </a:r>
             <a:r>
-              <a:rPr lang="en-US" sz="2000">
+              <a:rPr lang="en-US" sz="2000" dirty="0">
                 <a:ea typeface="Inter"/>
               </a:rPr>
               <a:t> </a:t>
             </a:r>
             <a:r>
-              <a:rPr lang="en-US" sz="2000" err="1">
+              <a:rPr lang="en-US" sz="2000" dirty="0" err="1">
                 <a:ea typeface="Inter"/>
               </a:rPr>
               <a:t>koodihaldusprogramm</a:t>
             </a:r>
             <a:r>
-              <a:rPr lang="en-US" sz="2000">
+              <a:rPr lang="en-US" sz="2000" dirty="0">
                 <a:ea typeface="Inter"/>
               </a:rPr>
               <a:t>, </a:t>
             </a:r>
             <a:r>
-              <a:rPr lang="en-US" sz="2000" err="1">
+              <a:rPr lang="en-US" sz="2000" dirty="0" err="1">
                 <a:ea typeface="Inter"/>
               </a:rPr>
               <a:t>vajalik</a:t>
             </a:r>
             <a:r>
-              <a:rPr lang="en-US" sz="2000">
+              <a:rPr lang="en-US" sz="2000" dirty="0">
                 <a:ea typeface="Inter"/>
               </a:rPr>
+              <a:t> alla </a:t>
+            </a:r>
+            <a:r>
+              <a:rPr lang="en-US" sz="2000" dirty="0" err="1">
+                <a:ea typeface="Inter"/>
+              </a:rPr>
+              <a:t>laadida</a:t>
+            </a:r>
+            <a:r>
+              <a:rPr lang="en-US" sz="2000" dirty="0">
+                <a:ea typeface="Inter"/>
+              </a:rPr>
+              <a:t>, </a:t>
+            </a:r>
+            <a:r>
+              <a:rPr lang="en-US" sz="2000" dirty="0" err="1">
+                <a:ea typeface="Inter"/>
+              </a:rPr>
+              <a:t>ühendub</a:t>
+            </a:r>
+            <a:r>
+              <a:rPr lang="en-US" sz="2000" dirty="0">
+                <a:ea typeface="Inter"/>
+              </a:rPr>
               <a:t> </a:t>
             </a:r>
             <a:r>
-              <a:rPr lang="en-US" sz="2000" err="1">
+              <a:rPr lang="en-US" sz="2000" dirty="0" err="1">
                 <a:ea typeface="Inter"/>
               </a:rPr>
-              <a:t>alla</a:t>
-            </a:r>
-            <a:r>
-              <a:rPr lang="en-US" sz="2000">
-                <a:ea typeface="Inter"/>
-              </a:rPr>
-              <a:t> </a:t>
-            </a:r>
-            <a:r>
-              <a:rPr lang="en-US" sz="2000" err="1">
-                <a:ea typeface="Inter"/>
-              </a:rPr>
-              <a:t>laadida</a:t>
-            </a:r>
-            <a:r>
-              <a:rPr lang="en-US" sz="2000">
-                <a:ea typeface="Inter"/>
-              </a:rPr>
-              <a:t>, </a:t>
-            </a:r>
-            <a:r>
-              <a:rPr lang="en-US" sz="2000" err="1">
-                <a:ea typeface="Inter"/>
-              </a:rPr>
-              <a:t>ühendub</a:t>
-            </a:r>
-            <a:r>
-              <a:rPr lang="en-US" sz="2000">
-                <a:ea typeface="Inter"/>
-              </a:rPr>
-              <a:t> </a:t>
-            </a:r>
-            <a:r>
-              <a:rPr lang="en-US" sz="2000" err="1">
-                <a:ea typeface="Inter"/>
-              </a:rPr>
               <a:t>Gitiga</a:t>
             </a:r>
-            <a:endParaRPr lang="en-US" sz="2000" err="1"/>
+            <a:endParaRPr lang="en-US" sz="2000" dirty="0"/>
           </a:p>
           <a:p>
             <a:pPr lvl="2">
@@ -29332,7 +28738,7 @@
               <a:buChar char="§"/>
             </a:pPr>
             <a:r>
-              <a:rPr lang="en-US" sz="2000">
+              <a:rPr lang="en-US" sz="2000" dirty="0">
                 <a:ea typeface="+mn-lt"/>
                 <a:cs typeface="+mn-lt"/>
                 <a:hlinkClick r:id="rId4"/>
@@ -29340,13 +28746,13 @@
               <a:t>https://code.visualstudio.com/</a:t>
             </a:r>
             <a:r>
-              <a:rPr lang="en-US" sz="2000">
+              <a:rPr lang="en-US" sz="2000" dirty="0">
                 <a:ea typeface="+mn-lt"/>
                 <a:cs typeface="+mn-lt"/>
               </a:rPr>
               <a:t> </a:t>
             </a:r>
-            <a:endParaRPr lang="en-US" sz="2000"/>
+            <a:endParaRPr lang="en-US" sz="2000" dirty="0"/>
           </a:p>
           <a:p>
             <a:pPr>
@@ -29354,7 +28760,7 @@
                 <a:spcPct val="150000"/>
               </a:lnSpc>
             </a:pPr>
-            <a:endParaRPr lang="en-US" sz="2400"/>
+            <a:endParaRPr lang="en-US" sz="2400" dirty="0"/>
           </a:p>
         </p:txBody>
       </p:sp>
@@ -29705,6 +29111,858 @@
         <p:cNvPr id="1" name="">
           <a:extLst>
             <a:ext uri="{FF2B5EF4-FFF2-40B4-BE49-F238E27FC236}">
+              <a16:creationId xmlns:a16="http://schemas.microsoft.com/office/drawing/2014/main" id="{5677A8FE-19F6-9C13-4D99-8744F249B654}"/>
+            </a:ext>
+          </a:extLst>
+        </p:cNvPr>
+        <p:cNvGrpSpPr/>
+        <p:nvPr/>
+      </p:nvGrpSpPr>
+      <p:grpSpPr>
+        <a:xfrm>
+          <a:off x="0" y="0"/>
+          <a:ext cx="0" cy="0"/>
+          <a:chOff x="0" y="0"/>
+          <a:chExt cx="0" cy="0"/>
+        </a:xfrm>
+      </p:grpSpPr>
+      <p:sp>
+        <p:nvSpPr>
+          <p:cNvPr id="2" name="Title 1">
+            <a:extLst>
+              <a:ext uri="{FF2B5EF4-FFF2-40B4-BE49-F238E27FC236}">
+                <a16:creationId xmlns:a16="http://schemas.microsoft.com/office/drawing/2014/main" id="{B8699A78-8BE3-B792-DDB1-AE1AB18FA473}"/>
+              </a:ext>
+            </a:extLst>
+          </p:cNvPr>
+          <p:cNvSpPr>
+            <a:spLocks noGrp="1"/>
+          </p:cNvSpPr>
+          <p:nvPr>
+            <p:ph type="ctrTitle"/>
+          </p:nvPr>
+        </p:nvSpPr>
+        <p:spPr/>
+        <p:txBody>
+          <a:bodyPr/>
+          <a:lstStyle/>
+          <a:p>
+            <a:r>
+              <a:rPr lang="en-US"/>
+              <a:t>SQL –  </a:t>
+            </a:r>
+            <a:r>
+              <a:rPr lang="en-US" err="1"/>
+              <a:t>päringu</a:t>
+            </a:r>
+            <a:r>
+              <a:rPr lang="en-US"/>
+              <a:t> </a:t>
+            </a:r>
+            <a:r>
+              <a:rPr lang="en-US" err="1"/>
+              <a:t>teostamise</a:t>
+            </a:r>
+            <a:r>
+              <a:rPr lang="en-US"/>
+              <a:t> </a:t>
+            </a:r>
+            <a:r>
+              <a:rPr lang="en-US" err="1"/>
+              <a:t>järjekord</a:t>
+            </a:r>
+          </a:p>
+        </p:txBody>
+      </p:sp>
+      <p:sp>
+        <p:nvSpPr>
+          <p:cNvPr id="5" name="Content Placeholder 4">
+            <a:extLst>
+              <a:ext uri="{FF2B5EF4-FFF2-40B4-BE49-F238E27FC236}">
+                <a16:creationId xmlns:a16="http://schemas.microsoft.com/office/drawing/2014/main" id="{CFC55C9B-B86D-AF94-D837-6292B30A4552}"/>
+              </a:ext>
+            </a:extLst>
+          </p:cNvPr>
+          <p:cNvSpPr>
+            <a:spLocks noGrp="1"/>
+          </p:cNvSpPr>
+          <p:nvPr>
+            <p:ph sz="quarter" idx="10"/>
+          </p:nvPr>
+        </p:nvSpPr>
+        <p:spPr/>
+        <p:txBody>
+          <a:bodyPr/>
+          <a:lstStyle/>
+          <a:p>
+            <a:pPr marL="0" indent="0">
+              <a:buNone/>
+            </a:pPr>
+            <a:r>
+              <a:rPr lang="en-US">
+                <a:ea typeface="Inter"/>
+              </a:rPr>
+              <a:t>1. FROM/JOIN </a:t>
+            </a:r>
+          </a:p>
+          <a:p>
+            <a:pPr lvl="1">
+              <a:buFont typeface="Wingdings" panose="020B0502030000000004" pitchFamily="34" charset="0"/>
+              <a:buChar char="Ø"/>
+            </a:pPr>
+            <a:r>
+              <a:rPr lang="en-US" err="1">
+                <a:ea typeface="Inter"/>
+              </a:rPr>
+              <a:t>Defineerib</a:t>
+            </a:r>
+            <a:r>
+              <a:rPr lang="en-US">
+                <a:ea typeface="Inter"/>
+              </a:rPr>
+              <a:t>, </a:t>
+            </a:r>
+            <a:r>
+              <a:rPr lang="en-US" err="1">
+                <a:ea typeface="Inter"/>
+              </a:rPr>
+              <a:t>milliseid</a:t>
+            </a:r>
+            <a:r>
+              <a:rPr lang="en-US">
+                <a:ea typeface="Inter"/>
+              </a:rPr>
+              <a:t> </a:t>
+            </a:r>
+            <a:r>
+              <a:rPr lang="en-US" err="1">
+                <a:ea typeface="Inter"/>
+              </a:rPr>
+              <a:t>tabeleid</a:t>
+            </a:r>
+            <a:r>
+              <a:rPr lang="en-US">
+                <a:ea typeface="Inter"/>
+              </a:rPr>
+              <a:t> </a:t>
+            </a:r>
+            <a:r>
+              <a:rPr lang="en-US" err="1">
+                <a:ea typeface="Inter"/>
+              </a:rPr>
+              <a:t>kasutatakse</a:t>
+            </a:r>
+            <a:r>
+              <a:rPr lang="en-US">
+                <a:ea typeface="Inter"/>
+              </a:rPr>
+              <a:t>.</a:t>
+            </a:r>
+          </a:p>
+          <a:p>
+            <a:pPr marL="0" indent="0">
+              <a:buNone/>
+            </a:pPr>
+            <a:r>
+              <a:rPr lang="en-US">
+                <a:ea typeface="Inter"/>
+              </a:rPr>
+              <a:t>2. WHERE </a:t>
+            </a:r>
+          </a:p>
+          <a:p>
+            <a:pPr lvl="1">
+              <a:buFont typeface="Wingdings" panose="020B0502030000000004" pitchFamily="34" charset="0"/>
+              <a:buChar char="Ø"/>
+            </a:pPr>
+            <a:r>
+              <a:rPr lang="en-US" err="1">
+                <a:ea typeface="Inter"/>
+              </a:rPr>
+              <a:t>Filtreerib</a:t>
+            </a:r>
+            <a:r>
+              <a:rPr lang="en-US">
+                <a:ea typeface="Inter"/>
+              </a:rPr>
+              <a:t> </a:t>
+            </a:r>
+            <a:r>
+              <a:rPr lang="en-US" err="1">
+                <a:ea typeface="Inter"/>
+              </a:rPr>
+              <a:t>välja</a:t>
+            </a:r>
+            <a:r>
+              <a:rPr lang="en-US">
+                <a:ea typeface="Inter"/>
+              </a:rPr>
+              <a:t> </a:t>
+            </a:r>
+            <a:r>
+              <a:rPr lang="en-US" err="1">
+                <a:ea typeface="Inter"/>
+              </a:rPr>
+              <a:t>andmeread</a:t>
+            </a:r>
+            <a:r>
+              <a:rPr lang="en-US">
+                <a:ea typeface="Inter"/>
+              </a:rPr>
+              <a:t>, mis </a:t>
+            </a:r>
+            <a:r>
+              <a:rPr lang="en-US" err="1">
+                <a:ea typeface="Inter"/>
+              </a:rPr>
+              <a:t>ei</a:t>
+            </a:r>
+            <a:r>
+              <a:rPr lang="en-US">
+                <a:ea typeface="Inter"/>
+              </a:rPr>
+              <a:t> </a:t>
+            </a:r>
+            <a:r>
+              <a:rPr lang="en-US" err="1">
+                <a:ea typeface="Inter"/>
+              </a:rPr>
+              <a:t>vasta</a:t>
+            </a:r>
+            <a:r>
+              <a:rPr lang="en-US">
+                <a:ea typeface="Inter"/>
+              </a:rPr>
+              <a:t> </a:t>
+            </a:r>
+            <a:r>
+              <a:rPr lang="en-US" err="1">
+                <a:ea typeface="Inter"/>
+              </a:rPr>
+              <a:t>tingimustele</a:t>
+            </a:r>
+            <a:r>
+              <a:rPr lang="en-US">
+                <a:ea typeface="Inter"/>
+              </a:rPr>
+              <a:t>.</a:t>
+            </a:r>
+            <a:endParaRPr lang="en-US"/>
+          </a:p>
+          <a:p>
+            <a:pPr marL="0" indent="0">
+              <a:buNone/>
+            </a:pPr>
+            <a:r>
+              <a:rPr lang="en-US">
+                <a:ea typeface="Inter"/>
+              </a:rPr>
+              <a:t>3. GROUP BY </a:t>
+            </a:r>
+          </a:p>
+          <a:p>
+            <a:pPr lvl="1">
+              <a:buFont typeface="Wingdings" panose="020B0502030000000004" pitchFamily="34" charset="0"/>
+              <a:buChar char="Ø"/>
+            </a:pPr>
+            <a:r>
+              <a:rPr lang="en-US" err="1">
+                <a:ea typeface="Inter"/>
+              </a:rPr>
+              <a:t>Grupeerib</a:t>
+            </a:r>
+            <a:r>
+              <a:rPr lang="en-US">
+                <a:ea typeface="Inter"/>
+              </a:rPr>
+              <a:t> </a:t>
+            </a:r>
+            <a:r>
+              <a:rPr lang="en-US" err="1">
+                <a:ea typeface="Inter"/>
+              </a:rPr>
+              <a:t>andmeread</a:t>
+            </a:r>
+            <a:r>
+              <a:rPr lang="en-US">
+                <a:ea typeface="Inter"/>
+              </a:rPr>
+              <a:t>.</a:t>
+            </a:r>
+            <a:endParaRPr lang="en-US"/>
+          </a:p>
+          <a:p>
+            <a:pPr marL="0" indent="0">
+              <a:buNone/>
+            </a:pPr>
+            <a:r>
+              <a:rPr lang="en-US">
+                <a:ea typeface="Inter"/>
+              </a:rPr>
+              <a:t>4. HAVING </a:t>
+            </a:r>
+          </a:p>
+          <a:p>
+            <a:pPr marL="800100" lvl="1">
+              <a:buFont typeface="Wingdings" panose="020B0502030000000004" pitchFamily="34" charset="0"/>
+              <a:buChar char="Ø"/>
+            </a:pPr>
+            <a:r>
+              <a:rPr lang="en-US" err="1">
+                <a:ea typeface="Inter"/>
+              </a:rPr>
+              <a:t>Filtreerib</a:t>
+            </a:r>
+            <a:r>
+              <a:rPr lang="en-US">
+                <a:ea typeface="Inter"/>
+              </a:rPr>
+              <a:t> </a:t>
+            </a:r>
+            <a:r>
+              <a:rPr lang="en-US" err="1">
+                <a:ea typeface="Inter"/>
+              </a:rPr>
+              <a:t>välja</a:t>
+            </a:r>
+            <a:r>
+              <a:rPr lang="en-US">
+                <a:ea typeface="Inter"/>
+              </a:rPr>
+              <a:t> </a:t>
+            </a:r>
+            <a:r>
+              <a:rPr lang="en-US" err="1">
+                <a:ea typeface="Inter"/>
+              </a:rPr>
+              <a:t>grupeeritud</a:t>
+            </a:r>
+            <a:r>
+              <a:rPr lang="en-US">
+                <a:ea typeface="Inter"/>
+              </a:rPr>
+              <a:t> </a:t>
+            </a:r>
+            <a:r>
+              <a:rPr lang="en-US" err="1">
+                <a:ea typeface="Inter"/>
+              </a:rPr>
+              <a:t>andmeread</a:t>
+            </a:r>
+            <a:r>
+              <a:rPr lang="en-US">
+                <a:ea typeface="Inter"/>
+              </a:rPr>
+              <a:t>, mis </a:t>
+            </a:r>
+            <a:r>
+              <a:rPr lang="en-US" err="1">
+                <a:ea typeface="Inter"/>
+              </a:rPr>
+              <a:t>ei</a:t>
+            </a:r>
+            <a:r>
+              <a:rPr lang="en-US">
+                <a:ea typeface="Inter"/>
+              </a:rPr>
+              <a:t> </a:t>
+            </a:r>
+            <a:r>
+              <a:rPr lang="en-US" err="1">
+                <a:ea typeface="Inter"/>
+              </a:rPr>
+              <a:t>vasta</a:t>
+            </a:r>
+            <a:r>
+              <a:rPr lang="en-US">
+                <a:ea typeface="Inter"/>
+              </a:rPr>
+              <a:t> </a:t>
+            </a:r>
+            <a:r>
+              <a:rPr lang="en-US" err="1">
+                <a:ea typeface="Inter"/>
+              </a:rPr>
+              <a:t>tingimustele</a:t>
+            </a:r>
+            <a:r>
+              <a:rPr lang="en-US">
+                <a:ea typeface="Inter"/>
+              </a:rPr>
+              <a:t>.</a:t>
+            </a:r>
+          </a:p>
+          <a:p>
+            <a:pPr marL="0" indent="0">
+              <a:buNone/>
+            </a:pPr>
+            <a:r>
+              <a:rPr lang="en-US">
+                <a:ea typeface="Inter"/>
+              </a:rPr>
+              <a:t>5. SELECT </a:t>
+            </a:r>
+          </a:p>
+          <a:p>
+            <a:pPr marL="800100" lvl="1">
+              <a:buFont typeface="Wingdings" panose="020B0502030000000004" pitchFamily="34" charset="0"/>
+              <a:buChar char="Ø"/>
+            </a:pPr>
+            <a:r>
+              <a:rPr lang="en-US" err="1">
+                <a:ea typeface="Inter"/>
+              </a:rPr>
+              <a:t>Valib</a:t>
+            </a:r>
+            <a:r>
+              <a:rPr lang="en-US">
+                <a:ea typeface="Inter"/>
+              </a:rPr>
+              <a:t> </a:t>
+            </a:r>
+            <a:r>
+              <a:rPr lang="en-US" err="1">
+                <a:ea typeface="Inter"/>
+              </a:rPr>
+              <a:t>tulbad</a:t>
+            </a:r>
+            <a:r>
+              <a:rPr lang="en-US">
+                <a:ea typeface="Inter"/>
+              </a:rPr>
+              <a:t>, </a:t>
+            </a:r>
+            <a:r>
+              <a:rPr lang="en-US" err="1">
+                <a:ea typeface="Inter"/>
+              </a:rPr>
+              <a:t>mida</a:t>
+            </a:r>
+            <a:r>
+              <a:rPr lang="en-US">
+                <a:ea typeface="Inter"/>
+              </a:rPr>
+              <a:t> </a:t>
+            </a:r>
+            <a:r>
+              <a:rPr lang="en-US" err="1">
+                <a:ea typeface="Inter"/>
+              </a:rPr>
+              <a:t>näidata</a:t>
+            </a:r>
+            <a:r>
+              <a:rPr lang="en-US">
+                <a:ea typeface="Inter"/>
+              </a:rPr>
+              <a:t>.</a:t>
+            </a:r>
+          </a:p>
+          <a:p>
+            <a:pPr marL="0" indent="0">
+              <a:buNone/>
+            </a:pPr>
+            <a:r>
+              <a:rPr lang="en-US">
+                <a:ea typeface="Inter"/>
+              </a:rPr>
+              <a:t>6. ORDER BY </a:t>
+            </a:r>
+          </a:p>
+          <a:p>
+            <a:pPr marL="800100" lvl="1">
+              <a:buClr>
+                <a:srgbClr val="121212"/>
+              </a:buClr>
+              <a:buFont typeface="Wingdings" panose="020B0502030000000004" pitchFamily="34" charset="0"/>
+              <a:buChar char="Ø"/>
+            </a:pPr>
+            <a:r>
+              <a:rPr lang="en-US" err="1">
+                <a:ea typeface="Inter"/>
+              </a:rPr>
+              <a:t>Sorteerib</a:t>
+            </a:r>
+            <a:r>
+              <a:rPr lang="en-US">
+                <a:ea typeface="Inter"/>
+              </a:rPr>
+              <a:t> </a:t>
+            </a:r>
+            <a:r>
+              <a:rPr lang="en-US" err="1">
+                <a:ea typeface="Inter"/>
+              </a:rPr>
+              <a:t>valitud</a:t>
+            </a:r>
+            <a:r>
+              <a:rPr lang="en-US">
+                <a:ea typeface="Inter"/>
+              </a:rPr>
+              <a:t> </a:t>
+            </a:r>
+            <a:r>
+              <a:rPr lang="en-US" err="1">
+                <a:ea typeface="Inter"/>
+              </a:rPr>
+              <a:t>andmeread</a:t>
+            </a:r>
+            <a:r>
+              <a:rPr lang="en-US">
+                <a:ea typeface="Inter"/>
+              </a:rPr>
+              <a:t>.</a:t>
+            </a:r>
+            <a:endParaRPr lang="en-US"/>
+          </a:p>
+          <a:p>
+            <a:pPr marL="0" indent="0">
+              <a:buNone/>
+            </a:pPr>
+            <a:r>
+              <a:rPr lang="en-US">
+                <a:ea typeface="Inter"/>
+              </a:rPr>
+              <a:t>7. LIMIT</a:t>
+            </a:r>
+          </a:p>
+          <a:p>
+            <a:pPr marL="800100" lvl="1">
+              <a:buFont typeface="Wingdings" panose="020B0502030000000004" pitchFamily="34" charset="0"/>
+              <a:buChar char="Ø"/>
+            </a:pPr>
+            <a:r>
+              <a:rPr lang="en-US" err="1">
+                <a:ea typeface="Inter"/>
+              </a:rPr>
+              <a:t>Jätab</a:t>
+            </a:r>
+            <a:r>
+              <a:rPr lang="en-US">
+                <a:ea typeface="Inter"/>
+              </a:rPr>
+              <a:t> </a:t>
+            </a:r>
+            <a:r>
+              <a:rPr lang="en-US" err="1">
+                <a:ea typeface="Inter"/>
+              </a:rPr>
+              <a:t>alles</a:t>
+            </a:r>
+            <a:r>
+              <a:rPr lang="en-US">
+                <a:ea typeface="Inter"/>
+              </a:rPr>
+              <a:t> </a:t>
+            </a:r>
+            <a:r>
+              <a:rPr lang="en-US" err="1">
+                <a:ea typeface="Inter"/>
+              </a:rPr>
+              <a:t>ainult</a:t>
+            </a:r>
+            <a:r>
+              <a:rPr lang="en-US">
+                <a:ea typeface="Inter"/>
+              </a:rPr>
+              <a:t> </a:t>
+            </a:r>
+            <a:r>
+              <a:rPr lang="en-US" err="1">
+                <a:ea typeface="Inter"/>
+              </a:rPr>
+              <a:t>täpsustatud</a:t>
+            </a:r>
+            <a:r>
+              <a:rPr lang="en-US">
+                <a:ea typeface="Inter"/>
+              </a:rPr>
+              <a:t> </a:t>
+            </a:r>
+            <a:r>
+              <a:rPr lang="en-US" err="1">
+                <a:ea typeface="Inter"/>
+              </a:rPr>
+              <a:t>arvu</a:t>
+            </a:r>
+            <a:r>
+              <a:rPr lang="en-US">
+                <a:ea typeface="Inter"/>
+              </a:rPr>
+              <a:t> </a:t>
+            </a:r>
+            <a:r>
+              <a:rPr lang="en-US" err="1">
+                <a:ea typeface="Inter"/>
+              </a:rPr>
+              <a:t>ridu</a:t>
+            </a:r>
+            <a:r>
+              <a:rPr lang="en-US">
+                <a:ea typeface="Inter"/>
+              </a:rPr>
+              <a:t>.</a:t>
+            </a:r>
+            <a:endParaRPr lang="en-US"/>
+          </a:p>
+          <a:p>
+            <a:pPr marL="800100" lvl="1">
+              <a:buFont typeface="Wingdings" panose="020B0502030000000004" pitchFamily="34" charset="0"/>
+              <a:buChar char="Ø"/>
+            </a:pPr>
+            <a:endParaRPr lang="en-US"/>
+          </a:p>
+          <a:p>
+            <a:pPr marL="285750" indent="-285750">
+              <a:buClr>
+                <a:srgbClr val="121212"/>
+              </a:buClr>
+            </a:pPr>
+            <a:r>
+              <a:rPr lang="en-US" err="1">
+                <a:ea typeface="Inter"/>
+              </a:rPr>
+              <a:t>Teostamise</a:t>
+            </a:r>
+            <a:r>
+              <a:rPr lang="en-US">
+                <a:ea typeface="Inter"/>
+              </a:rPr>
+              <a:t> </a:t>
+            </a:r>
+            <a:r>
+              <a:rPr lang="en-US" err="1">
+                <a:ea typeface="Inter"/>
+              </a:rPr>
+              <a:t>järjekord</a:t>
+            </a:r>
+            <a:r>
+              <a:rPr lang="en-US">
+                <a:ea typeface="Inter"/>
+              </a:rPr>
+              <a:t> </a:t>
+            </a:r>
+            <a:r>
+              <a:rPr lang="en-US" err="1">
+                <a:ea typeface="Inter"/>
+              </a:rPr>
+              <a:t>muutub</a:t>
+            </a:r>
+            <a:r>
+              <a:rPr lang="en-US">
+                <a:ea typeface="Inter"/>
+              </a:rPr>
+              <a:t> </a:t>
+            </a:r>
+            <a:r>
+              <a:rPr lang="en-US" err="1">
+                <a:ea typeface="Inter"/>
+              </a:rPr>
+              <a:t>oluliseks</a:t>
+            </a:r>
+            <a:r>
+              <a:rPr lang="en-US">
+                <a:ea typeface="Inter"/>
+              </a:rPr>
+              <a:t> </a:t>
+            </a:r>
+            <a:r>
+              <a:rPr lang="en-US" err="1">
+                <a:ea typeface="Inter"/>
+              </a:rPr>
+              <a:t>suuremate</a:t>
+            </a:r>
+            <a:r>
+              <a:rPr lang="en-US">
+                <a:ea typeface="Inter"/>
+              </a:rPr>
+              <a:t> </a:t>
+            </a:r>
+            <a:r>
+              <a:rPr lang="en-US" err="1">
+                <a:ea typeface="Inter"/>
+              </a:rPr>
+              <a:t>päringute</a:t>
+            </a:r>
+            <a:r>
+              <a:rPr lang="en-US">
+                <a:ea typeface="Inter"/>
+              </a:rPr>
+              <a:t> </a:t>
+            </a:r>
+            <a:r>
+              <a:rPr lang="en-US" err="1">
+                <a:ea typeface="Inter"/>
+              </a:rPr>
+              <a:t>puhul</a:t>
+            </a:r>
+            <a:r>
+              <a:rPr lang="en-US">
+                <a:ea typeface="Inter"/>
+              </a:rPr>
+              <a:t>. Mida </a:t>
+            </a:r>
+            <a:r>
+              <a:rPr lang="en-US" err="1">
+                <a:ea typeface="Inter"/>
+              </a:rPr>
+              <a:t>varasemas</a:t>
+            </a:r>
+            <a:r>
+              <a:rPr lang="en-US">
+                <a:ea typeface="Inter"/>
+              </a:rPr>
+              <a:t> </a:t>
+            </a:r>
+            <a:r>
+              <a:rPr lang="en-US" err="1">
+                <a:ea typeface="Inter"/>
+              </a:rPr>
+              <a:t>sammus</a:t>
+            </a:r>
+            <a:r>
+              <a:rPr lang="en-US">
+                <a:ea typeface="Inter"/>
+              </a:rPr>
+              <a:t> </a:t>
+            </a:r>
+            <a:r>
+              <a:rPr lang="en-US" err="1">
+                <a:ea typeface="Inter"/>
+              </a:rPr>
+              <a:t>saad</a:t>
+            </a:r>
+            <a:r>
+              <a:rPr lang="en-US">
+                <a:ea typeface="Inter"/>
+              </a:rPr>
+              <a:t> </a:t>
+            </a:r>
+            <a:r>
+              <a:rPr lang="en-US" err="1">
+                <a:ea typeface="Inter"/>
+              </a:rPr>
+              <a:t>päringu</a:t>
+            </a:r>
+            <a:r>
+              <a:rPr lang="en-US">
+                <a:ea typeface="Inter"/>
+              </a:rPr>
+              <a:t> </a:t>
+            </a:r>
+            <a:r>
+              <a:rPr lang="en-US" err="1">
+                <a:ea typeface="Inter"/>
+              </a:rPr>
+              <a:t>tulemusi</a:t>
+            </a:r>
+            <a:r>
+              <a:rPr lang="en-US">
+                <a:ea typeface="Inter"/>
+              </a:rPr>
+              <a:t> </a:t>
+            </a:r>
+            <a:r>
+              <a:rPr lang="en-US" err="1">
+                <a:ea typeface="Inter"/>
+              </a:rPr>
+              <a:t>piirata</a:t>
+            </a:r>
+            <a:r>
+              <a:rPr lang="en-US">
+                <a:ea typeface="Inter"/>
+              </a:rPr>
+              <a:t>, </a:t>
+            </a:r>
+            <a:r>
+              <a:rPr lang="en-US" err="1">
+                <a:ea typeface="Inter"/>
+              </a:rPr>
+              <a:t>seda</a:t>
+            </a:r>
+            <a:r>
+              <a:rPr lang="en-US">
+                <a:ea typeface="Inter"/>
+              </a:rPr>
+              <a:t> </a:t>
+            </a:r>
+            <a:r>
+              <a:rPr lang="en-US" err="1">
+                <a:ea typeface="Inter"/>
+              </a:rPr>
+              <a:t>optimaalsem</a:t>
+            </a:r>
+            <a:r>
+              <a:rPr lang="en-US">
+                <a:ea typeface="Inter"/>
+              </a:rPr>
+              <a:t> (</a:t>
+            </a:r>
+            <a:r>
+              <a:rPr lang="en-US" err="1">
+                <a:ea typeface="Inter"/>
+              </a:rPr>
+              <a:t>kiirem</a:t>
+            </a:r>
+            <a:r>
+              <a:rPr lang="en-US">
+                <a:ea typeface="Inter"/>
+              </a:rPr>
+              <a:t>) on </a:t>
+            </a:r>
+            <a:r>
+              <a:rPr lang="en-US" err="1">
+                <a:ea typeface="Inter"/>
+              </a:rPr>
+              <a:t>päringu</a:t>
+            </a:r>
+            <a:r>
+              <a:rPr lang="en-US">
+                <a:ea typeface="Inter"/>
+              </a:rPr>
+              <a:t> </a:t>
+            </a:r>
+            <a:r>
+              <a:rPr lang="en-US" err="1">
+                <a:ea typeface="Inter"/>
+              </a:rPr>
+              <a:t>teostus</a:t>
+            </a:r>
+            <a:r>
+              <a:rPr lang="en-US">
+                <a:ea typeface="Inter"/>
+              </a:rPr>
+              <a:t>.</a:t>
+            </a:r>
+            <a:endParaRPr lang="en-US"/>
+          </a:p>
+          <a:p>
+            <a:endParaRPr lang="en-US">
+              <a:cs typeface="+mn-lt"/>
+            </a:endParaRPr>
+          </a:p>
+        </p:txBody>
+      </p:sp>
+    </p:spTree>
+    <p:extLst>
+      <p:ext uri="{BB962C8B-B14F-4D97-AF65-F5344CB8AC3E}">
+        <p14:creationId xmlns:p14="http://schemas.microsoft.com/office/powerpoint/2010/main" val="3665876313"/>
+      </p:ext>
+    </p:extLst>
+  </p:cSld>
+  <p:clrMapOvr>
+    <a:masterClrMapping/>
+  </p:clrMapOvr>
+</p:sld>
+</file>
+
+<file path=ppt/slides/slide8.xml><?xml version="1.0" encoding="utf-8"?>
+<p:sld xmlns:a="http://schemas.openxmlformats.org/drawingml/2006/main" xmlns:r="http://schemas.openxmlformats.org/officeDocument/2006/relationships" xmlns:p="http://schemas.openxmlformats.org/presentationml/2006/main">
+  <p:cSld>
+    <p:spTree>
+      <p:nvGrpSpPr>
+        <p:cNvPr id="1" name="">
+          <a:extLst>
+            <a:ext uri="{FF2B5EF4-FFF2-40B4-BE49-F238E27FC236}">
               <a16:creationId xmlns:a16="http://schemas.microsoft.com/office/drawing/2014/main" id="{8C2A2250-7D37-3829-65F1-E12C067916F2}"/>
             </a:ext>
           </a:extLst>
@@ -29805,7 +30063,7 @@
         <p:spPr>
           <a:xfrm>
             <a:off x="677170" y="1222424"/>
-            <a:ext cx="10386210" cy="3600986"/>
+            <a:ext cx="10386210" cy="4524315"/>
           </a:xfrm>
           <a:prstGeom prst="rect">
             <a:avLst/>
@@ -29955,6 +30213,75 @@
               <a:lnSpc>
                 <a:spcPct val="150000"/>
               </a:lnSpc>
+              <a:buFont typeface="Courier New"/>
+              <a:buChar char="o"/>
+            </a:pPr>
+            <a:r>
+              <a:rPr lang="en-US" sz="2000" dirty="0" err="1">
+                <a:ea typeface="Inter"/>
+              </a:rPr>
+              <a:t>Salvestame</a:t>
+            </a:r>
+            <a:r>
+              <a:rPr lang="en-US" sz="2000" dirty="0">
+                <a:ea typeface="Inter"/>
+              </a:rPr>
+              <a:t> </a:t>
+            </a:r>
+            <a:r>
+              <a:rPr lang="en-US" sz="2000" dirty="0" err="1">
+                <a:ea typeface="Inter"/>
+              </a:rPr>
+              <a:t>andmebaasi</a:t>
+            </a:r>
+            <a:r>
+              <a:rPr lang="en-US" sz="2000" dirty="0">
+                <a:ea typeface="Inter"/>
+              </a:rPr>
+              <a:t> </a:t>
+            </a:r>
+            <a:r>
+              <a:rPr lang="en-US" sz="2000" dirty="0" err="1">
+                <a:ea typeface="Inter"/>
+              </a:rPr>
+              <a:t>enda</a:t>
+            </a:r>
+            <a:r>
+              <a:rPr lang="en-US" sz="2000" dirty="0">
+                <a:ea typeface="Inter"/>
+              </a:rPr>
+              <a:t> </a:t>
+            </a:r>
+            <a:r>
+              <a:rPr lang="en-US" sz="2000" dirty="0" err="1">
+                <a:ea typeface="Inter"/>
+              </a:rPr>
+              <a:t>arvutisse</a:t>
+            </a:r>
+            <a:endParaRPr lang="en-US" sz="2000" dirty="0">
+              <a:ea typeface="Inter"/>
+            </a:endParaRPr>
+          </a:p>
+          <a:p>
+            <a:pPr marL="742950" lvl="1" indent="-285750">
+              <a:lnSpc>
+                <a:spcPct val="150000"/>
+              </a:lnSpc>
+              <a:buFont typeface="Courier New"/>
+              <a:buChar char="o"/>
+            </a:pPr>
+            <a:r>
+              <a:rPr lang="en-US" sz="2000" dirty="0">
+                <a:ea typeface="Inter"/>
+              </a:rPr>
+              <a:t>Export database</a:t>
+            </a:r>
+          </a:p>
+          <a:p>
+            <a:pPr marL="285750" indent="-285750">
+              <a:lnSpc>
+                <a:spcPct val="150000"/>
+              </a:lnSpc>
               <a:buFont typeface="Arial"/>
               <a:buChar char="•"/>
             </a:pPr>
@@ -30040,7 +30367,7 @@
 </p:sld>
 </file>
 
-<file path=ppt/slides/slide8.xml><?xml version="1.0" encoding="utf-8"?>
+<file path=ppt/slides/slide9.xml><?xml version="1.0" encoding="utf-8"?>
 <p:sld xmlns:a="http://schemas.openxmlformats.org/drawingml/2006/main" xmlns:r="http://schemas.openxmlformats.org/officeDocument/2006/relationships" xmlns:p="http://schemas.openxmlformats.org/presentationml/2006/main">
   <p:cSld>
     <p:spTree>
@@ -30144,178 +30471,6 @@
     <p:extLst>
       <p:ext uri="{BB962C8B-B14F-4D97-AF65-F5344CB8AC3E}">
         <p14:creationId xmlns:p14="http://schemas.microsoft.com/office/powerpoint/2010/main" val="1316149546"/>
-      </p:ext>
-    </p:extLst>
-  </p:cSld>
-  <p:clrMapOvr>
-    <a:masterClrMapping/>
-  </p:clrMapOvr>
-</p:sld>
-</file>
-
-<file path=ppt/slides/slide9.xml><?xml version="1.0" encoding="utf-8"?>
-<p:sld xmlns:a="http://schemas.openxmlformats.org/drawingml/2006/main" xmlns:r="http://schemas.openxmlformats.org/officeDocument/2006/relationships" xmlns:p="http://schemas.openxmlformats.org/presentationml/2006/main">
-  <p:cSld>
-    <p:spTree>
-      <p:nvGrpSpPr>
-        <p:cNvPr id="1" name="">
-          <a:extLst>
-            <a:ext uri="{FF2B5EF4-FFF2-40B4-BE49-F238E27FC236}">
-              <a16:creationId xmlns:a16="http://schemas.microsoft.com/office/drawing/2014/main" id="{554F17EF-948F-440F-9776-D47D637800CE}"/>
-            </a:ext>
-          </a:extLst>
-        </p:cNvPr>
-        <p:cNvGrpSpPr/>
-        <p:nvPr/>
-      </p:nvGrpSpPr>
-      <p:grpSpPr>
-        <a:xfrm>
-          <a:off x="0" y="0"/>
-          <a:ext cx="0" cy="0"/>
-          <a:chOff x="0" y="0"/>
-          <a:chExt cx="0" cy="0"/>
-        </a:xfrm>
-      </p:grpSpPr>
-      <p:sp>
-        <p:nvSpPr>
-          <p:cNvPr id="2" name="Title 1">
-            <a:extLst>
-              <a:ext uri="{FF2B5EF4-FFF2-40B4-BE49-F238E27FC236}">
-                <a16:creationId xmlns:a16="http://schemas.microsoft.com/office/drawing/2014/main" id="{E0AF7675-D5E2-4284-152D-B43170B2B2B8}"/>
-              </a:ext>
-            </a:extLst>
-          </p:cNvPr>
-          <p:cNvSpPr>
-            <a:spLocks noGrp="1"/>
-          </p:cNvSpPr>
-          <p:nvPr>
-            <p:ph type="ctrTitle"/>
-          </p:nvPr>
-        </p:nvSpPr>
-        <p:spPr/>
-        <p:txBody>
-          <a:bodyPr/>
-          <a:lstStyle/>
-          <a:p>
-            <a:r>
-              <a:rPr lang="en-US"/>
-              <a:t>SQL –  </a:t>
-            </a:r>
-            <a:r>
-              <a:rPr lang="en-US" err="1"/>
-              <a:t>põhikäsud</a:t>
-            </a:r>
-          </a:p>
-        </p:txBody>
-      </p:sp>
-      <p:sp>
-        <p:nvSpPr>
-          <p:cNvPr id="3" name="Content Placeholder 2">
-            <a:extLst>
-              <a:ext uri="{FF2B5EF4-FFF2-40B4-BE49-F238E27FC236}">
-                <a16:creationId xmlns:a16="http://schemas.microsoft.com/office/drawing/2014/main" id="{DD4A3DF0-7EC7-0A70-4125-F5DB0D9859E0}"/>
-              </a:ext>
-            </a:extLst>
-          </p:cNvPr>
-          <p:cNvSpPr>
-            <a:spLocks noGrp="1"/>
-          </p:cNvSpPr>
-          <p:nvPr>
-            <p:ph sz="quarter" idx="10"/>
-          </p:nvPr>
-        </p:nvSpPr>
-        <p:spPr/>
-        <p:txBody>
-          <a:bodyPr/>
-          <a:lstStyle/>
-          <a:p>
-            <a:pPr>
-              <a:lnSpc>
-                <a:spcPct val="150000"/>
-              </a:lnSpc>
-            </a:pPr>
-            <a:endParaRPr lang="en-US" sz="2400"/>
-          </a:p>
-          <a:p>
-            <a:pPr>
-              <a:lnSpc>
-                <a:spcPct val="150000"/>
-              </a:lnSpc>
-            </a:pPr>
-            <a:endParaRPr lang="en-US" sz="2400"/>
-          </a:p>
-        </p:txBody>
-      </p:sp>
-      <p:sp>
-        <p:nvSpPr>
-          <p:cNvPr id="6" name="TextBox 5">
-            <a:extLst>
-              <a:ext uri="{FF2B5EF4-FFF2-40B4-BE49-F238E27FC236}">
-                <a16:creationId xmlns:a16="http://schemas.microsoft.com/office/drawing/2014/main" id="{881D8A84-5C3E-D3EC-7BBA-46AD750AB1C1}"/>
-              </a:ext>
-            </a:extLst>
-          </p:cNvPr>
-          <p:cNvSpPr txBox="1"/>
-          <p:nvPr/>
-        </p:nvSpPr>
-        <p:spPr>
-          <a:xfrm>
-            <a:off x="677170" y="1222424"/>
-            <a:ext cx="10386210" cy="830997"/>
-          </a:xfrm>
-          <a:prstGeom prst="rect">
-            <a:avLst/>
-          </a:prstGeom>
-          <a:noFill/>
-        </p:spPr>
-        <p:txBody>
-          <a:bodyPr rot="0" spcFirstLastPara="0" vertOverflow="overflow" horzOverflow="overflow" vert="horz" wrap="square" lIns="91440" tIns="45720" rIns="91440" bIns="45720" numCol="1" spcCol="0" rtlCol="0" fromWordArt="0" anchor="t" anchorCtr="0" forceAA="0" compatLnSpc="1">
-            <a:prstTxWarp prst="textNoShape">
-              <a:avLst/>
-            </a:prstTxWarp>
-            <a:spAutoFit/>
-          </a:bodyPr>
-          <a:lstStyle/>
-          <a:p>
-            <a:pPr marL="285750" indent="-285750">
-              <a:lnSpc>
-                <a:spcPct val="150000"/>
-              </a:lnSpc>
-              <a:buFont typeface="Arial"/>
-              <a:buChar char="•"/>
-            </a:pPr>
-            <a:r>
-              <a:rPr lang="en-US" sz="2000" err="1">
-                <a:solidFill>
-                  <a:srgbClr val="121212"/>
-                </a:solidFill>
-                <a:ea typeface="+mn-lt"/>
-                <a:cs typeface="+mn-lt"/>
-              </a:rPr>
-              <a:t>Iseseisvalt</a:t>
-            </a:r>
-            <a:r>
-              <a:rPr lang="en-US" sz="2000">
-                <a:solidFill>
-                  <a:srgbClr val="121212"/>
-                </a:solidFill>
-                <a:ea typeface="+mn-lt"/>
-                <a:cs typeface="+mn-lt"/>
-              </a:rPr>
-              <a:t>: sql_ulesanded_2.txt</a:t>
-            </a:r>
-          </a:p>
-          <a:p>
-            <a:endParaRPr lang="en-US">
-              <a:ea typeface="Inter"/>
-            </a:endParaRPr>
-          </a:p>
-        </p:txBody>
-      </p:sp>
-    </p:spTree>
-    <p:extLst>
-      <p:ext uri="{BB962C8B-B14F-4D97-AF65-F5344CB8AC3E}">
-        <p14:creationId xmlns:p14="http://schemas.microsoft.com/office/powerpoint/2010/main" val="1929900480"/>
       </p:ext>
     </p:extLst>
   </p:cSld>
@@ -31117,12 +31272,6 @@
 </file>
 
 <file path=customXml/item1.xml><?xml version="1.0" encoding="utf-8"?>
-<p:properties xmlns:p="http://schemas.microsoft.com/office/2006/metadata/properties" xmlns:xsi="http://www.w3.org/2001/XMLSchema-instance" xmlns:pc="http://schemas.microsoft.com/office/infopath/2007/PartnerControls">
-  <documentManagement/>
-</p:properties>
-</file>
-
-<file path=customXml/item2.xml><?xml version="1.0" encoding="utf-8"?>
 <ct:contentTypeSchema xmlns:ct="http://schemas.microsoft.com/office/2006/metadata/contentType" xmlns:ma="http://schemas.microsoft.com/office/2006/metadata/properties/metaAttributes" ct:_="" ma:_="" ma:contentTypeName="Document" ma:contentTypeID="0x010100C4D27B8FA8976546BCD79313C588588D" ma:contentTypeVersion="8" ma:contentTypeDescription="Create a new document." ma:contentTypeScope="" ma:versionID="a112c56f6fe148a79025c76584832af0">
   <xsd:schema xmlns:xsd="http://www.w3.org/2001/XMLSchema" xmlns:xs="http://www.w3.org/2001/XMLSchema" xmlns:p="http://schemas.microsoft.com/office/2006/metadata/properties" xmlns:ns2="a1a2d923-8fea-42f1-bd41-9cdfff65694e" targetNamespace="http://schemas.microsoft.com/office/2006/metadata/properties" ma:root="true" ma:fieldsID="97c8655d467eaa9470a714421e7268c0" ns2:_="">
     <xsd:import namespace="a1a2d923-8fea-42f1-bd41-9cdfff65694e"/>
@@ -31290,6 +31439,12 @@
 </ct:contentTypeSchema>
 </file>
 
+<file path=customXml/item2.xml><?xml version="1.0" encoding="utf-8"?>
+<p:properties xmlns:p="http://schemas.microsoft.com/office/2006/metadata/properties" xmlns:xsi="http://www.w3.org/2001/XMLSchema-instance" xmlns:pc="http://schemas.microsoft.com/office/infopath/2007/PartnerControls">
+  <documentManagement/>
+</p:properties>
+</file>
+
 <file path=customXml/item3.xml><?xml version="1.0" encoding="utf-8"?>
 <?mso-contentType ?>
 <FormTemplates xmlns="http://schemas.microsoft.com/sharepoint/v3/contenttype/forms">
@@ -31300,15 +31455,6 @@
 </file>
 
 <file path=customXml/itemProps1.xml><?xml version="1.0" encoding="utf-8"?>
-<ds:datastoreItem xmlns:ds="http://schemas.openxmlformats.org/officeDocument/2006/customXml" ds:itemID="{5BDF4908-A52A-47DD-A794-6E02D71942FC}">
-  <ds:schemaRefs>
-    <ds:schemaRef ds:uri="http://schemas.microsoft.com/office/2006/metadata/properties"/>
-    <ds:schemaRef ds:uri="http://schemas.microsoft.com/office/infopath/2007/PartnerControls"/>
-  </ds:schemaRefs>
-</ds:datastoreItem>
-</file>
-
-<file path=customXml/itemProps2.xml><?xml version="1.0" encoding="utf-8"?>
 <ds:datastoreItem xmlns:ds="http://schemas.openxmlformats.org/officeDocument/2006/customXml" ds:itemID="{9CF4F972-2392-44D0-AA45-41AC4FDC4A59}">
   <ds:schemaRefs>
     <ds:schemaRef ds:uri="a1a2d923-8fea-42f1-bd41-9cdfff65694e"/>
@@ -31326,6 +31472,15 @@
 </ds:datastoreItem>
 </file>
 
+<file path=customXml/itemProps2.xml><?xml version="1.0" encoding="utf-8"?>
+<ds:datastoreItem xmlns:ds="http://schemas.openxmlformats.org/officeDocument/2006/customXml" ds:itemID="{5BDF4908-A52A-47DD-A794-6E02D71942FC}">
+  <ds:schemaRefs>
+    <ds:schemaRef ds:uri="http://schemas.microsoft.com/office/2006/metadata/properties"/>
+    <ds:schemaRef ds:uri="http://schemas.microsoft.com/office/infopath/2007/PartnerControls"/>
+  </ds:schemaRefs>
+</ds:datastoreItem>
+</file>
+
 <file path=customXml/itemProps3.xml><?xml version="1.0" encoding="utf-8"?>
 <ds:datastoreItem xmlns:ds="http://schemas.openxmlformats.org/officeDocument/2006/customXml" ds:itemID="{9DC439CA-6F1C-4005-ACA6-A52E04DEE0A7}">
   <ds:schemaRefs>
